--- a/thuyettrinh.pptx
+++ b/thuyettrinh.pptx
@@ -623,7 +623,7 @@
           <a:p>
             <a:r>
               <a:rPr lang="en-US"/>
-              <a:t/>
+              <a:t>Good morning. My name is Ho The Loc from class DA24TTC. Today I will present my Web project: Plant Shop System using HTML DOM.</a:t>
             </a:r>
             <a:endParaRPr lang="en-US" smtClean="0"/>
           </a:p>
@@ -836,9 +836,14 @@
           <a:p>
             <a:r>
               <a:rPr lang="en-US"/>
-              <a:t/>
-            </a:r>
-            <a:endParaRPr lang="en-US" smtClean="0"/>
+              <a:t>Thank you for listening. I've prepared a question about Event Delegation, and I'm ready to answer any questions you have.</a:t>
+            </a:r>
+          </a:p>
+          <a:p>
+            <a:r>
+              <a:rPr lang="en-US"/>
+              <a:t>This is my demo. I invite everyone to take a look.</a:t>
+            </a:r>
           </a:p>
         </p:txBody>
       </p:sp>
@@ -1049,7 +1054,7 @@
           <a:p>
             <a:r>
               <a:rPr lang="en-US"/>
-              <a:t/>
+              <a:t>The project goals are: creating a dynamic UI, building a shopping cart using CRUD workflow, and writing secure JavaScript code.</a:t>
             </a:r>
             <a:endParaRPr lang="en-US" smtClean="0"/>
           </a:p>
@@ -1262,7 +1267,7 @@
           <a:p>
             <a:r>
               <a:rPr lang="en-US"/>
-              <a:t/>
+              <a:t>I used HTML and Bootstrap for layout, and centralized data in an Array. All logic is written in Vanilla JS without external libraries.</a:t>
             </a:r>
             <a:endParaRPr lang="en-US" smtClean="0"/>
           </a:p>
@@ -1475,7 +1480,7 @@
           <a:p>
             <a:r>
               <a:rPr lang="en-US"/>
-              <a:t/>
+              <a:t>For data management, storing products in an Array of Objects separates the data from the visual interface, making updates very easy.</a:t>
             </a:r>
             <a:endParaRPr lang="en-US" smtClean="0"/>
           </a:p>
@@ -1688,7 +1693,7 @@
           <a:p>
             <a:r>
               <a:rPr lang="en-US"/>
-              <a:t/>
+              <a:t>To build the UI securely, I used document.createElement. This prevents malicious code execution, known as XSS attacks, compared to using innerHTML.</a:t>
             </a:r>
             <a:endParaRPr lang="en-US" smtClean="0"/>
           </a:p>
@@ -1901,7 +1906,7 @@
           <a:p>
             <a:r>
               <a:rPr lang="en-US"/>
-              <a:t/>
+              <a:t>The DOM tree is assembled from the inside out. I use appendChild to build the hierarchy in memory before displaying it.</a:t>
             </a:r>
             <a:endParaRPr lang="en-US" smtClean="0"/>
           </a:p>
@@ -2114,7 +2119,7 @@
           <a:p>
             <a:r>
               <a:rPr lang="en-US"/>
-              <a:t/>
+              <a:t>To process user clicks instantly, I embedded the product ID and price directly into the buttons using HTML data-attributes.</a:t>
             </a:r>
             <a:endParaRPr lang="en-US" smtClean="0"/>
           </a:p>
@@ -2327,7 +2332,7 @@
           <a:p>
             <a:r>
               <a:rPr lang="en-US"/>
-              <a:t/>
+              <a:t>This is the core feature: Event Delegation. I attached ONE listener to the parent container instead of multiple buttons to save memory.</a:t>
             </a:r>
             <a:endParaRPr lang="en-US" smtClean="0"/>
           </a:p>
@@ -2540,7 +2545,7 @@
           <a:p>
             <a:r>
               <a:rPr lang="en-US"/>
-              <a:t/>
+              <a:t>For the details page, I pass the product ID through the URL and read it using URLSearchParams, then render it safely with textContent.</a:t>
             </a:r>
             <a:endParaRPr lang="en-US" smtClean="0"/>
           </a:p>
@@ -5610,7 +5615,7 @@
           <a:blipFill>
             <a:blip r:embed="rId3"/>
             <a:stretch>
-              <a:fillRect l="0" t="0" r="0" b="0"/>
+              <a:fillRect l="0" t="-9222" r="0" b="-9222"/>
             </a:stretch>
           </a:blipFill>
         </p:spPr>
@@ -5623,312 +5628,15 @@
         </p:nvGrpSpPr>
         <p:grpSpPr>
           <a:xfrm rot="0">
-            <a:off x="0" y="0"/>
-            <a:ext cx="18288000" cy="10287000"/>
+            <a:off x="7864354" y="0"/>
+            <a:ext cx="2840456" cy="2840456"/>
             <a:chOff x="0" y="0"/>
-            <a:chExt cx="24384000" cy="13716000"/>
+            <a:chExt cx="3412350" cy="3412350"/>
           </a:xfrm>
         </p:grpSpPr>
         <p:sp>
           <p:nvSpPr>
-            <p:cNvPr name="Freeform 4" id="4" descr="image.png"/>
-            <p:cNvSpPr/>
-            <p:nvPr/>
-          </p:nvSpPr>
-          <p:spPr>
-            <a:xfrm flipH="false" flipV="false" rot="0">
-              <a:off x="0" y="0"/>
-              <a:ext cx="24384000" cy="13716000"/>
-            </a:xfrm>
-            <a:custGeom>
-              <a:avLst/>
-              <a:gdLst/>
-              <a:ahLst/>
-              <a:cxnLst/>
-              <a:rect r="r" b="b" t="t" l="l"/>
-              <a:pathLst>
-                <a:path h="13716000" w="24384000">
-                  <a:moveTo>
-                    <a:pt x="0" y="0"/>
-                  </a:moveTo>
-                  <a:lnTo>
-                    <a:pt x="24384000" y="0"/>
-                  </a:lnTo>
-                  <a:lnTo>
-                    <a:pt x="24384000" y="13716000"/>
-                  </a:lnTo>
-                  <a:lnTo>
-                    <a:pt x="0" y="13716000"/>
-                  </a:lnTo>
-                  <a:lnTo>
-                    <a:pt x="0" y="0"/>
-                  </a:lnTo>
-                  <a:close/>
-                </a:path>
-              </a:pathLst>
-            </a:custGeom>
-            <a:blipFill>
-              <a:blip r:embed="rId3"/>
-              <a:stretch>
-                <a:fillRect l="0" t="0" r="0" b="0"/>
-              </a:stretch>
-            </a:blipFill>
-            <a:ln w="66675" cap="sq">
-              <a:gradFill>
-                <a:gsLst>
-                  <a:gs pos="0">
-                    <a:srgbClr val="1880BB">
-                      <a:alpha val="100000"/>
-                    </a:srgbClr>
-                  </a:gs>
-                  <a:gs pos="100000">
-                    <a:srgbClr val="E2E2E2">
-                      <a:alpha val="100000"/>
-                    </a:srgbClr>
-                  </a:gs>
-                </a:gsLst>
-                <a:lin ang="2700000"/>
-              </a:gradFill>
-              <a:prstDash val="solid"/>
-              <a:miter/>
-            </a:ln>
-          </p:spPr>
-        </p:sp>
-      </p:grpSp>
-      <p:sp>
-        <p:nvSpPr>
-          <p:cNvPr name="TextBox 5" id="5"/>
-          <p:cNvSpPr txBox="true"/>
-          <p:nvPr/>
-        </p:nvSpPr>
-        <p:spPr>
-          <a:xfrm rot="0">
-            <a:off x="-492269" y="3349291"/>
-            <a:ext cx="19646926" cy="1402512"/>
-          </a:xfrm>
-          <a:prstGeom prst="rect">
-            <a:avLst/>
-          </a:prstGeom>
-        </p:spPr>
-        <p:txBody>
-          <a:bodyPr anchor="t" rtlCol="false" tIns="0" lIns="0" bIns="0" rIns="0">
-            <a:spAutoFit/>
-          </a:bodyPr>
-          <a:lstStyle/>
-          <a:p>
-            <a:pPr algn="ctr">
-              <a:lnSpc>
-                <a:spcPts val="10729"/>
-              </a:lnSpc>
-            </a:pPr>
-            <a:r>
-              <a:rPr lang="en-US" b="true" sz="8128">
-                <a:solidFill>
-                  <a:srgbClr val="1B5E20"/>
-                </a:solidFill>
-                <a:latin typeface="Poppins Bold"/>
-                <a:ea typeface="Poppins Bold"/>
-                <a:cs typeface="Poppins Bold"/>
-                <a:sym typeface="Poppins Bold"/>
-              </a:rPr>
-              <a:t>PLANT SHOP SYSTEM</a:t>
-            </a:r>
-          </a:p>
-        </p:txBody>
-      </p:sp>
-      <p:sp>
-        <p:nvSpPr>
-          <p:cNvPr name="TextBox 6" id="6"/>
-          <p:cNvSpPr txBox="true"/>
-          <p:nvPr/>
-        </p:nvSpPr>
-        <p:spPr>
-          <a:xfrm rot="0">
-            <a:off x="2876378" y="5237578"/>
-            <a:ext cx="12535215" cy="646938"/>
-          </a:xfrm>
-          <a:prstGeom prst="rect">
-            <a:avLst/>
-          </a:prstGeom>
-        </p:spPr>
-        <p:txBody>
-          <a:bodyPr anchor="t" rtlCol="false" tIns="0" lIns="0" bIns="0" rIns="0">
-            <a:spAutoFit/>
-          </a:bodyPr>
-          <a:lstStyle/>
-          <a:p>
-            <a:pPr algn="ctr">
-              <a:lnSpc>
-                <a:spcPts val="5616"/>
-              </a:lnSpc>
-            </a:pPr>
-            <a:r>
-              <a:rPr lang="en-US" sz="2925">
-                <a:solidFill>
-                  <a:srgbClr val="64748B"/>
-                </a:solidFill>
-                <a:latin typeface="Lato"/>
-                <a:ea typeface="Lato"/>
-                <a:cs typeface="Lato"/>
-                <a:sym typeface="Lato"/>
-              </a:rPr>
-              <a:t>HTML </a:t>
-            </a:r>
-            <a:r>
-              <a:rPr lang="en-US" sz="2925">
-                <a:solidFill>
-                  <a:srgbClr val="64748B"/>
-                </a:solidFill>
-                <a:latin typeface="Lato"/>
-                <a:ea typeface="Lato"/>
-                <a:cs typeface="Lato"/>
-                <a:sym typeface="Lato"/>
-              </a:rPr>
-              <a:t>DOM Application Project</a:t>
-            </a:r>
-          </a:p>
-        </p:txBody>
-      </p:sp>
-      <p:sp>
-        <p:nvSpPr>
-          <p:cNvPr name="TextBox 7" id="7"/>
-          <p:cNvSpPr txBox="true"/>
-          <p:nvPr/>
-        </p:nvSpPr>
-        <p:spPr>
-          <a:xfrm rot="0">
-            <a:off x="857250" y="6889204"/>
-            <a:ext cx="16573500" cy="381152"/>
-          </a:xfrm>
-          <a:prstGeom prst="rect">
-            <a:avLst/>
-          </a:prstGeom>
-        </p:spPr>
-        <p:txBody>
-          <a:bodyPr anchor="t" rtlCol="false" tIns="0" lIns="0" bIns="0" rIns="0">
-            <a:spAutoFit/>
-          </a:bodyPr>
-          <a:lstStyle/>
-          <a:p>
-            <a:pPr algn="ctr">
-              <a:lnSpc>
-                <a:spcPts val="2970"/>
-              </a:lnSpc>
-            </a:pPr>
-            <a:r>
-              <a:rPr lang="en-US" b="true" sz="2475">
-                <a:solidFill>
-                  <a:srgbClr val="1B5E20"/>
-                </a:solidFill>
-                <a:latin typeface="Lato Bold"/>
-                <a:ea typeface="Lato Bold"/>
-                <a:cs typeface="Lato Bold"/>
-                <a:sym typeface="Lato Bold"/>
-              </a:rPr>
-              <a:t>Presented by: Ho The Loc </a:t>
-            </a:r>
-          </a:p>
-        </p:txBody>
-      </p:sp>
-      <p:sp>
-        <p:nvSpPr>
-          <p:cNvPr name="TextBox 8" id="8"/>
-          <p:cNvSpPr txBox="true"/>
-          <p:nvPr/>
-        </p:nvSpPr>
-        <p:spPr>
-          <a:xfrm rot="0">
-            <a:off x="857250" y="7270356"/>
-            <a:ext cx="16573500" cy="381152"/>
-          </a:xfrm>
-          <a:prstGeom prst="rect">
-            <a:avLst/>
-          </a:prstGeom>
-        </p:spPr>
-        <p:txBody>
-          <a:bodyPr anchor="t" rtlCol="false" tIns="0" lIns="0" bIns="0" rIns="0">
-            <a:spAutoFit/>
-          </a:bodyPr>
-          <a:lstStyle/>
-          <a:p>
-            <a:pPr algn="ctr">
-              <a:lnSpc>
-                <a:spcPts val="2970"/>
-              </a:lnSpc>
-            </a:pPr>
-            <a:r>
-              <a:rPr lang="en-US" b="true" sz="2475">
-                <a:solidFill>
-                  <a:srgbClr val="1B5E20"/>
-                </a:solidFill>
-                <a:latin typeface="Lato Bold"/>
-                <a:ea typeface="Lato Bold"/>
-                <a:cs typeface="Lato Bold"/>
-                <a:sym typeface="Lato Bold"/>
-              </a:rPr>
-              <a:t>Student ID: 110124109 </a:t>
-            </a:r>
-          </a:p>
-        </p:txBody>
-      </p:sp>
-      <p:sp>
-        <p:nvSpPr>
-          <p:cNvPr name="TextBox 9" id="9"/>
-          <p:cNvSpPr txBox="true"/>
-          <p:nvPr/>
-        </p:nvSpPr>
-        <p:spPr>
-          <a:xfrm rot="0">
-            <a:off x="857364" y="7651499"/>
-            <a:ext cx="16573500" cy="381152"/>
-          </a:xfrm>
-          <a:prstGeom prst="rect">
-            <a:avLst/>
-          </a:prstGeom>
-        </p:spPr>
-        <p:txBody>
-          <a:bodyPr anchor="t" rtlCol="false" tIns="0" lIns="0" bIns="0" rIns="0">
-            <a:spAutoFit/>
-          </a:bodyPr>
-          <a:lstStyle/>
-          <a:p>
-            <a:pPr algn="ctr">
-              <a:lnSpc>
-                <a:spcPts val="2970"/>
-              </a:lnSpc>
-            </a:pPr>
-            <a:r>
-              <a:rPr lang="en-US" b="true" sz="2475">
-                <a:solidFill>
-                  <a:srgbClr val="1B5E20"/>
-                </a:solidFill>
-                <a:latin typeface="Lato Bold"/>
-                <a:ea typeface="Lato Bold"/>
-                <a:cs typeface="Lato Bold"/>
-                <a:sym typeface="Lato Bold"/>
-              </a:rPr>
-              <a:t>Class: DA24TTC </a:t>
-            </a:r>
-          </a:p>
-        </p:txBody>
-      </p:sp>
-      <p:grpSp>
-        <p:nvGrpSpPr>
-          <p:cNvPr name="Group 10" id="10"/>
-          <p:cNvGrpSpPr/>
-          <p:nvPr/>
-        </p:nvGrpSpPr>
-        <p:grpSpPr>
-          <a:xfrm rot="0">
-            <a:off x="7864354" y="270710"/>
-            <a:ext cx="2559263" cy="2559263"/>
-            <a:chOff x="0" y="0"/>
-            <a:chExt cx="3412350" cy="3412350"/>
-          </a:xfrm>
-        </p:grpSpPr>
-        <p:sp>
-          <p:nvSpPr>
-            <p:cNvPr name="Freeform 11" id="11"/>
+            <p:cNvPr name="Freeform 4" id="4"/>
             <p:cNvSpPr/>
             <p:nvPr/>
           </p:nvSpPr>
@@ -5973,6 +5681,223 @@
           </p:spPr>
         </p:sp>
       </p:grpSp>
+      <p:sp>
+        <p:nvSpPr>
+          <p:cNvPr name="TextBox 5" id="5"/>
+          <p:cNvSpPr txBox="true"/>
+          <p:nvPr/>
+        </p:nvSpPr>
+        <p:spPr>
+          <a:xfrm rot="0">
+            <a:off x="-492269" y="3311191"/>
+            <a:ext cx="19646926" cy="1724025"/>
+          </a:xfrm>
+          <a:prstGeom prst="rect">
+            <a:avLst/>
+          </a:prstGeom>
+        </p:spPr>
+        <p:txBody>
+          <a:bodyPr anchor="t" rtlCol="false" tIns="0" lIns="0" bIns="0" rIns="0">
+            <a:spAutoFit/>
+          </a:bodyPr>
+          <a:lstStyle/>
+          <a:p>
+            <a:pPr algn="ctr">
+              <a:lnSpc>
+                <a:spcPts val="13199"/>
+              </a:lnSpc>
+            </a:pPr>
+            <a:r>
+              <a:rPr lang="en-US" b="true" sz="9999">
+                <a:solidFill>
+                  <a:srgbClr val="1B5E20"/>
+                </a:solidFill>
+                <a:latin typeface="Poppins Bold"/>
+                <a:ea typeface="Poppins Bold"/>
+                <a:cs typeface="Poppins Bold"/>
+                <a:sym typeface="Poppins Bold"/>
+              </a:rPr>
+              <a:t>PLANT SHOP SYSTEM</a:t>
+            </a:r>
+          </a:p>
+        </p:txBody>
+      </p:sp>
+      <p:sp>
+        <p:nvSpPr>
+          <p:cNvPr name="TextBox 6" id="6"/>
+          <p:cNvSpPr txBox="true"/>
+          <p:nvPr/>
+        </p:nvSpPr>
+        <p:spPr>
+          <a:xfrm rot="0">
+            <a:off x="2876378" y="5237578"/>
+            <a:ext cx="12535215" cy="659130"/>
+          </a:xfrm>
+          <a:prstGeom prst="rect">
+            <a:avLst/>
+          </a:prstGeom>
+        </p:spPr>
+        <p:txBody>
+          <a:bodyPr anchor="t" rtlCol="false" tIns="0" lIns="0" bIns="0" rIns="0">
+            <a:spAutoFit/>
+          </a:bodyPr>
+          <a:lstStyle/>
+          <a:p>
+            <a:pPr algn="ctr">
+              <a:lnSpc>
+                <a:spcPts val="5759"/>
+              </a:lnSpc>
+            </a:pPr>
+            <a:r>
+              <a:rPr lang="en-US" sz="3000">
+                <a:solidFill>
+                  <a:srgbClr val="64748B"/>
+                </a:solidFill>
+                <a:latin typeface="Lato"/>
+                <a:ea typeface="Lato"/>
+                <a:cs typeface="Lato"/>
+                <a:sym typeface="Lato"/>
+              </a:rPr>
+              <a:t>HTML </a:t>
+            </a:r>
+            <a:r>
+              <a:rPr lang="en-US" sz="3000">
+                <a:solidFill>
+                  <a:srgbClr val="64748B"/>
+                </a:solidFill>
+                <a:latin typeface="Lato"/>
+                <a:ea typeface="Lato"/>
+                <a:cs typeface="Lato"/>
+                <a:sym typeface="Lato"/>
+              </a:rPr>
+              <a:t>DOM Application Project</a:t>
+            </a:r>
+          </a:p>
+        </p:txBody>
+      </p:sp>
+      <p:sp>
+        <p:nvSpPr>
+          <p:cNvPr name="TextBox 7" id="7"/>
+          <p:cNvSpPr txBox="true"/>
+          <p:nvPr/>
+        </p:nvSpPr>
+        <p:spPr>
+          <a:xfrm rot="0">
+            <a:off x="6899675" y="6991159"/>
+            <a:ext cx="4488622" cy="462333"/>
+          </a:xfrm>
+          <a:prstGeom prst="rect">
+            <a:avLst/>
+          </a:prstGeom>
+        </p:spPr>
+        <p:txBody>
+          <a:bodyPr anchor="t" rtlCol="false" tIns="0" lIns="0" bIns="0" rIns="0">
+            <a:spAutoFit/>
+          </a:bodyPr>
+          <a:lstStyle/>
+          <a:p>
+            <a:pPr algn="ctr">
+              <a:lnSpc>
+                <a:spcPts val="3617"/>
+              </a:lnSpc>
+            </a:pPr>
+            <a:r>
+              <a:rPr lang="en-US" b="true" sz="3014">
+                <a:solidFill>
+                  <a:srgbClr val="1B5E20"/>
+                </a:solidFill>
+                <a:latin typeface="Lato Bold"/>
+                <a:ea typeface="Lato Bold"/>
+                <a:cs typeface="Lato Bold"/>
+                <a:sym typeface="Lato Bold"/>
+              </a:rPr>
+              <a:t>Presented by: Ho The Loc </a:t>
+            </a:r>
+          </a:p>
+        </p:txBody>
+      </p:sp>
+      <p:sp>
+        <p:nvSpPr>
+          <p:cNvPr name="TextBox 8" id="8"/>
+          <p:cNvSpPr txBox="true"/>
+          <p:nvPr/>
+        </p:nvSpPr>
+        <p:spPr>
+          <a:xfrm rot="0">
+            <a:off x="7079256" y="7433099"/>
+            <a:ext cx="4129459" cy="462333"/>
+          </a:xfrm>
+          <a:prstGeom prst="rect">
+            <a:avLst/>
+          </a:prstGeom>
+        </p:spPr>
+        <p:txBody>
+          <a:bodyPr anchor="t" rtlCol="false" tIns="0" lIns="0" bIns="0" rIns="0">
+            <a:spAutoFit/>
+          </a:bodyPr>
+          <a:lstStyle/>
+          <a:p>
+            <a:pPr algn="ctr">
+              <a:lnSpc>
+                <a:spcPts val="3617"/>
+              </a:lnSpc>
+            </a:pPr>
+            <a:r>
+              <a:rPr lang="en-US" b="true" sz="3014">
+                <a:solidFill>
+                  <a:srgbClr val="1B5E20"/>
+                </a:solidFill>
+                <a:latin typeface="Lato Bold"/>
+                <a:ea typeface="Lato Bold"/>
+                <a:cs typeface="Lato Bold"/>
+                <a:sym typeface="Lato Bold"/>
+              </a:rPr>
+              <a:t>Student ID: 110124109 </a:t>
+            </a:r>
+          </a:p>
+        </p:txBody>
+      </p:sp>
+      <p:sp>
+        <p:nvSpPr>
+          <p:cNvPr name="TextBox 9" id="9"/>
+          <p:cNvSpPr txBox="true"/>
+          <p:nvPr/>
+        </p:nvSpPr>
+        <p:spPr>
+          <a:xfrm rot="0">
+            <a:off x="7705164" y="7875029"/>
+            <a:ext cx="2877909" cy="462333"/>
+          </a:xfrm>
+          <a:prstGeom prst="rect">
+            <a:avLst/>
+          </a:prstGeom>
+        </p:spPr>
+        <p:txBody>
+          <a:bodyPr anchor="t" rtlCol="false" tIns="0" lIns="0" bIns="0" rIns="0">
+            <a:spAutoFit/>
+          </a:bodyPr>
+          <a:lstStyle/>
+          <a:p>
+            <a:pPr algn="ctr">
+              <a:lnSpc>
+                <a:spcPts val="3617"/>
+              </a:lnSpc>
+            </a:pPr>
+            <a:r>
+              <a:rPr lang="en-US" b="true" sz="3014">
+                <a:solidFill>
+                  <a:srgbClr val="1B5E20"/>
+                </a:solidFill>
+                <a:latin typeface="Lato Bold"/>
+                <a:ea typeface="Lato Bold"/>
+                <a:cs typeface="Lato Bold"/>
+                <a:sym typeface="Lato Bold"/>
+              </a:rPr>
+              <a:t>Class: DA24TTC </a:t>
+            </a:r>
+          </a:p>
+        </p:txBody>
+      </p:sp>
     </p:spTree>
   </p:cSld>
   <p:clrMapOvr>
@@ -5998,138 +5923,62 @@
           <a:chExt cx="0" cy="0"/>
         </a:xfrm>
       </p:grpSpPr>
-      <p:grpSp>
-        <p:nvGrpSpPr>
-          <p:cNvPr name="Group 2" id="2"/>
-          <p:cNvGrpSpPr/>
+      <p:sp>
+        <p:nvSpPr>
+          <p:cNvPr name="Freeform 2" id="2"/>
+          <p:cNvSpPr/>
           <p:nvPr/>
-        </p:nvGrpSpPr>
-        <p:grpSpPr>
-          <a:xfrm rot="0">
-            <a:off x="435874" y="-114300"/>
+        </p:nvSpPr>
+        <p:spPr>
+          <a:xfrm flipH="false" flipV="false" rot="0">
+            <a:off x="0" y="0"/>
             <a:ext cx="18288000" cy="10287000"/>
-            <a:chOff x="0" y="0"/>
-            <a:chExt cx="24384000" cy="13716000"/>
-          </a:xfrm>
-        </p:grpSpPr>
-        <p:sp>
-          <p:nvSpPr>
-            <p:cNvPr name="Freeform 3" id="3" descr="image.png"/>
-            <p:cNvSpPr/>
-            <p:nvPr/>
-          </p:nvSpPr>
-          <p:spPr>
-            <a:xfrm flipH="false" flipV="false" rot="0">
-              <a:off x="0" y="0"/>
-              <a:ext cx="24384000" cy="13716000"/>
-            </a:xfrm>
-            <a:custGeom>
-              <a:avLst/>
-              <a:gdLst/>
-              <a:ahLst/>
-              <a:cxnLst/>
-              <a:rect r="r" b="b" t="t" l="l"/>
-              <a:pathLst>
-                <a:path h="13716000" w="24384000">
-                  <a:moveTo>
-                    <a:pt x="0" y="0"/>
-                  </a:moveTo>
-                  <a:lnTo>
-                    <a:pt x="24384000" y="0"/>
-                  </a:lnTo>
-                  <a:lnTo>
-                    <a:pt x="24384000" y="13716000"/>
-                  </a:lnTo>
-                  <a:lnTo>
-                    <a:pt x="0" y="13716000"/>
-                  </a:lnTo>
-                  <a:lnTo>
-                    <a:pt x="0" y="0"/>
-                  </a:lnTo>
-                  <a:close/>
-                </a:path>
-              </a:pathLst>
-            </a:custGeom>
-            <a:blipFill>
-              <a:blip r:embed="rId3"/>
-              <a:stretch>
-                <a:fillRect l="0" t="0" r="0" b="0"/>
-              </a:stretch>
-            </a:blipFill>
-          </p:spPr>
-        </p:sp>
-      </p:grpSp>
-      <p:grpSp>
-        <p:nvGrpSpPr>
-          <p:cNvPr name="Group 4" id="4"/>
-          <p:cNvGrpSpPr/>
-          <p:nvPr/>
-        </p:nvGrpSpPr>
-        <p:grpSpPr>
-          <a:xfrm rot="0">
-            <a:off x="2357438" y="3264694"/>
-            <a:ext cx="5000625" cy="5000625"/>
-            <a:chOff x="0" y="0"/>
-            <a:chExt cx="6667500" cy="6667500"/>
-          </a:xfrm>
-        </p:grpSpPr>
-        <p:sp>
-          <p:nvSpPr>
-            <p:cNvPr name="Freeform 5" id="5" descr="image.png"/>
-            <p:cNvSpPr/>
-            <p:nvPr/>
-          </p:nvSpPr>
-          <p:spPr>
-            <a:xfrm flipH="false" flipV="false" rot="0">
-              <a:off x="0" y="0"/>
-              <a:ext cx="6667500" cy="6667500"/>
-            </a:xfrm>
-            <a:custGeom>
-              <a:avLst/>
-              <a:gdLst/>
-              <a:ahLst/>
-              <a:cxnLst/>
-              <a:rect r="r" b="b" t="t" l="l"/>
-              <a:pathLst>
-                <a:path h="6667500" w="6667500">
-                  <a:moveTo>
-                    <a:pt x="0" y="0"/>
-                  </a:moveTo>
-                  <a:lnTo>
-                    <a:pt x="6667500" y="0"/>
-                  </a:lnTo>
-                  <a:lnTo>
-                    <a:pt x="6667500" y="6667500"/>
-                  </a:lnTo>
-                  <a:lnTo>
-                    <a:pt x="0" y="6667500"/>
-                  </a:lnTo>
-                  <a:lnTo>
-                    <a:pt x="0" y="0"/>
-                  </a:lnTo>
-                  <a:close/>
-                </a:path>
-              </a:pathLst>
-            </a:custGeom>
-            <a:blipFill>
-              <a:blip r:embed="rId4"/>
-              <a:stretch>
-                <a:fillRect l="0" t="0" r="0" b="-285"/>
-              </a:stretch>
-            </a:blipFill>
-          </p:spPr>
-        </p:sp>
-      </p:grpSp>
-      <p:sp>
-        <p:nvSpPr>
-          <p:cNvPr name="TextBox 6" id="6"/>
+          </a:xfrm>
+          <a:custGeom>
+            <a:avLst/>
+            <a:gdLst/>
+            <a:ahLst/>
+            <a:cxnLst/>
+            <a:rect r="r" b="b" t="t" l="l"/>
+            <a:pathLst>
+              <a:path h="10287000" w="18288000">
+                <a:moveTo>
+                  <a:pt x="0" y="0"/>
+                </a:moveTo>
+                <a:lnTo>
+                  <a:pt x="18288000" y="0"/>
+                </a:lnTo>
+                <a:lnTo>
+                  <a:pt x="18288000" y="10287000"/>
+                </a:lnTo>
+                <a:lnTo>
+                  <a:pt x="0" y="10287000"/>
+                </a:lnTo>
+                <a:lnTo>
+                  <a:pt x="0" y="0"/>
+                </a:lnTo>
+                <a:close/>
+              </a:path>
+            </a:pathLst>
+          </a:custGeom>
+          <a:blipFill>
+            <a:blip r:embed="rId3"/>
+            <a:stretch>
+              <a:fillRect l="0" t="-38888" r="0" b="-38888"/>
+            </a:stretch>
+          </a:blipFill>
+        </p:spPr>
+      </p:sp>
+      <p:sp>
+        <p:nvSpPr>
+          <p:cNvPr name="TextBox 3" id="3"/>
           <p:cNvSpPr txBox="true"/>
           <p:nvPr/>
         </p:nvSpPr>
         <p:spPr>
           <a:xfrm rot="0">
-            <a:off x="2471547" y="857250"/>
-            <a:ext cx="14216654" cy="5577853"/>
+            <a:off x="11119993" y="4386861"/>
+            <a:ext cx="6139307" cy="1437078"/>
           </a:xfrm>
           <a:prstGeom prst="rect">
             <a:avLst/>
@@ -6141,139 +5990,26 @@
           </a:bodyPr>
           <a:lstStyle/>
           <a:p>
-            <a:pPr algn="l">
-              <a:lnSpc>
-                <a:spcPts val="21410"/>
-              </a:lnSpc>
-            </a:pPr>
-            <a:r>
-              <a:rPr lang="en-US" b="true" sz="17841">
-                <a:solidFill>
-                  <a:srgbClr val="1B5E20"/>
-                </a:solidFill>
-                <a:latin typeface="Poppins Bold"/>
-                <a:ea typeface="Poppins Bold"/>
-                <a:cs typeface="Poppins Bold"/>
-                <a:sym typeface="Poppins Bold"/>
-              </a:rPr>
-              <a:t>THANK</a:t>
-            </a:r>
-            <a:r>
-              <a:rPr lang="en-US" b="true" sz="17841">
-                <a:solidFill>
-                  <a:srgbClr val="1B5E20"/>
-                </a:solidFill>
-                <a:latin typeface="Poppins Bold"/>
-                <a:ea typeface="Poppins Bold"/>
-                <a:cs typeface="Poppins Bold"/>
-                <a:sym typeface="Poppins Bold"/>
-              </a:rPr>
-              <a:t> YOU!</a:t>
-            </a:r>
-          </a:p>
-          <a:p>
-            <a:pPr algn="l">
-              <a:lnSpc>
-                <a:spcPts val="21410"/>
-              </a:lnSpc>
-            </a:pPr>
-          </a:p>
-        </p:txBody>
-      </p:sp>
-      <p:sp>
-        <p:nvSpPr>
-          <p:cNvPr name="TextBox 7" id="7"/>
-          <p:cNvSpPr txBox="true"/>
-          <p:nvPr/>
-        </p:nvSpPr>
-        <p:spPr>
-          <a:xfrm rot="0">
-            <a:off x="6014898" y="4894823"/>
-            <a:ext cx="7129952" cy="870183"/>
-          </a:xfrm>
-          <a:prstGeom prst="rect">
-            <a:avLst/>
-          </a:prstGeom>
-        </p:spPr>
-        <p:txBody>
-          <a:bodyPr anchor="t" rtlCol="false" tIns="0" lIns="0" bIns="0" rIns="0">
-            <a:spAutoFit/>
-          </a:bodyPr>
-          <a:lstStyle/>
-          <a:p>
-            <a:pPr algn="l">
-              <a:lnSpc>
-                <a:spcPts val="7609"/>
-              </a:lnSpc>
-            </a:pPr>
-            <a:r>
-              <a:rPr lang="en-US" sz="3963">
-                <a:solidFill>
-                  <a:srgbClr val="334155"/>
-                </a:solidFill>
-                <a:latin typeface="Lato"/>
-                <a:ea typeface="Lato"/>
-                <a:cs typeface="Lato"/>
-                <a:sym typeface="Lato"/>
-              </a:rPr>
-              <a:t>Ready for Que</a:t>
-            </a:r>
-            <a:r>
-              <a:rPr lang="en-US" sz="3963">
-                <a:solidFill>
-                  <a:srgbClr val="334155"/>
-                </a:solidFill>
-                <a:latin typeface="Lato"/>
-                <a:ea typeface="Lato"/>
-                <a:cs typeface="Lato"/>
-                <a:sym typeface="Lato"/>
-              </a:rPr>
-              <a:t>stions &amp; Answers</a:t>
-            </a:r>
-          </a:p>
-        </p:txBody>
-      </p:sp>
-      <p:sp>
-        <p:nvSpPr>
-          <p:cNvPr name="TextBox 8" id="8"/>
-          <p:cNvSpPr txBox="true"/>
-          <p:nvPr/>
-        </p:nvSpPr>
-        <p:spPr>
-          <a:xfrm rot="0">
-            <a:off x="7089775" y="7209165"/>
-            <a:ext cx="4108450" cy="695325"/>
-          </a:xfrm>
-          <a:prstGeom prst="rect">
-            <a:avLst/>
-          </a:prstGeom>
-        </p:spPr>
-        <p:txBody>
-          <a:bodyPr anchor="t" rtlCol="false" tIns="0" lIns="0" bIns="0" rIns="0">
-            <a:spAutoFit/>
-          </a:bodyPr>
-          <a:lstStyle/>
-          <a:p>
             <a:pPr algn="ctr">
               <a:lnSpc>
-                <a:spcPts val="5130"/>
+                <a:spcPts val="10768"/>
               </a:lnSpc>
               <a:spcBef>
                 <a:spcPct val="0"/>
               </a:spcBef>
             </a:pPr>
             <a:r>
-              <a:rPr lang="en-US" b="true" sz="4275" u="sng">
-                <a:solidFill>
-                  <a:srgbClr val="000000"/>
+              <a:rPr lang="en-US" b="true" sz="8973" u="sng">
+                <a:solidFill>
+                  <a:srgbClr val="C1FF72"/>
                 </a:solidFill>
                 <a:latin typeface="Poppins Bold"/>
                 <a:ea typeface="Poppins Bold"/>
                 <a:cs typeface="Poppins Bold"/>
                 <a:sym typeface="Poppins Bold"/>
-                <a:hlinkClick r:id="rId5" tooltip="https://holoc2021tv.github.io/Demo-DOC/"/>
-              </a:rPr>
-              <a:t> Nhấn vào đây.</a:t>
+                <a:hlinkClick r:id="rId4" tooltip="https://holoc2021tv.github.io/110124109/"/>
+              </a:rPr>
+              <a:t>Click me !</a:t>
             </a:r>
           </a:p>
         </p:txBody>
@@ -6306,70 +6042,55 @@
           <a:chExt cx="0" cy="0"/>
         </a:xfrm>
       </p:grpSpPr>
+      <p:sp>
+        <p:nvSpPr>
+          <p:cNvPr name="Freeform 2" id="2"/>
+          <p:cNvSpPr/>
+          <p:nvPr/>
+        </p:nvSpPr>
+        <p:spPr>
+          <a:xfrm flipH="false" flipV="false" rot="0">
+            <a:off x="0" y="0"/>
+            <a:ext cx="18288000" cy="10287000"/>
+          </a:xfrm>
+          <a:custGeom>
+            <a:avLst/>
+            <a:gdLst/>
+            <a:ahLst/>
+            <a:cxnLst/>
+            <a:rect r="r" b="b" t="t" l="l"/>
+            <a:pathLst>
+              <a:path h="10287000" w="18288000">
+                <a:moveTo>
+                  <a:pt x="0" y="0"/>
+                </a:moveTo>
+                <a:lnTo>
+                  <a:pt x="18288000" y="0"/>
+                </a:lnTo>
+                <a:lnTo>
+                  <a:pt x="18288000" y="10287000"/>
+                </a:lnTo>
+                <a:lnTo>
+                  <a:pt x="0" y="10287000"/>
+                </a:lnTo>
+                <a:lnTo>
+                  <a:pt x="0" y="0"/>
+                </a:lnTo>
+                <a:close/>
+              </a:path>
+            </a:pathLst>
+          </a:custGeom>
+          <a:blipFill>
+            <a:blip r:embed="rId3"/>
+            <a:stretch>
+              <a:fillRect l="0" t="-9222" r="0" b="-9222"/>
+            </a:stretch>
+          </a:blipFill>
+        </p:spPr>
+      </p:sp>
       <p:grpSp>
         <p:nvGrpSpPr>
-          <p:cNvPr name="Group 2" id="2"/>
-          <p:cNvGrpSpPr/>
-          <p:nvPr/>
-        </p:nvGrpSpPr>
-        <p:grpSpPr>
-          <a:xfrm rot="0">
-            <a:off x="0" y="0"/>
-            <a:ext cx="18288000" cy="10287000"/>
-            <a:chOff x="0" y="0"/>
-            <a:chExt cx="24384000" cy="13716000"/>
-          </a:xfrm>
-        </p:grpSpPr>
-        <p:sp>
-          <p:nvSpPr>
-            <p:cNvPr name="Freeform 3" id="3" descr="image.png"/>
-            <p:cNvSpPr/>
-            <p:nvPr/>
-          </p:nvSpPr>
-          <p:spPr>
-            <a:xfrm flipH="false" flipV="false" rot="0">
-              <a:off x="0" y="0"/>
-              <a:ext cx="24384000" cy="13716000"/>
-            </a:xfrm>
-            <a:custGeom>
-              <a:avLst/>
-              <a:gdLst/>
-              <a:ahLst/>
-              <a:cxnLst/>
-              <a:rect r="r" b="b" t="t" l="l"/>
-              <a:pathLst>
-                <a:path h="13716000" w="24384000">
-                  <a:moveTo>
-                    <a:pt x="0" y="0"/>
-                  </a:moveTo>
-                  <a:lnTo>
-                    <a:pt x="24384000" y="0"/>
-                  </a:lnTo>
-                  <a:lnTo>
-                    <a:pt x="24384000" y="13716000"/>
-                  </a:lnTo>
-                  <a:lnTo>
-                    <a:pt x="0" y="13716000"/>
-                  </a:lnTo>
-                  <a:lnTo>
-                    <a:pt x="0" y="0"/>
-                  </a:lnTo>
-                  <a:close/>
-                </a:path>
-              </a:pathLst>
-            </a:custGeom>
-            <a:blipFill>
-              <a:blip r:embed="rId3"/>
-              <a:stretch>
-                <a:fillRect l="0" t="0" r="0" b="0"/>
-              </a:stretch>
-            </a:blipFill>
-          </p:spPr>
-        </p:sp>
-      </p:grpSp>
-      <p:grpSp>
-        <p:nvGrpSpPr>
-          <p:cNvPr name="Group 4" id="4"/>
+          <p:cNvPr name="Group 3" id="3"/>
           <p:cNvGrpSpPr/>
           <p:nvPr/>
         </p:nvGrpSpPr>
@@ -6383,7 +6104,7 @@
         </p:grpSpPr>
         <p:sp>
           <p:nvSpPr>
-            <p:cNvPr name="Freeform 5" id="5" descr="image.png"/>
+            <p:cNvPr name="Freeform 4" id="4" descr="image.png"/>
             <p:cNvSpPr/>
             <p:nvPr/>
           </p:nvSpPr>
@@ -6430,7 +6151,7 @@
       </p:grpSp>
       <p:grpSp>
         <p:nvGrpSpPr>
-          <p:cNvPr name="Group 6" id="6"/>
+          <p:cNvPr name="Group 5" id="5"/>
           <p:cNvGrpSpPr/>
           <p:nvPr/>
         </p:nvGrpSpPr>
@@ -6444,7 +6165,7 @@
         </p:grpSpPr>
         <p:sp>
           <p:nvSpPr>
-            <p:cNvPr name="Freeform 7" id="7" descr="image.png"/>
+            <p:cNvPr name="Freeform 6" id="6" descr="image.png"/>
             <p:cNvSpPr/>
             <p:nvPr/>
           </p:nvSpPr>
@@ -6491,7 +6212,7 @@
       </p:grpSp>
       <p:grpSp>
         <p:nvGrpSpPr>
-          <p:cNvPr name="Group 8" id="8"/>
+          <p:cNvPr name="Group 7" id="7"/>
           <p:cNvGrpSpPr/>
           <p:nvPr/>
         </p:nvGrpSpPr>
@@ -6505,7 +6226,7 @@
         </p:grpSpPr>
         <p:sp>
           <p:nvSpPr>
-            <p:cNvPr name="Freeform 9" id="9" descr="image.png"/>
+            <p:cNvPr name="Freeform 8" id="8" descr="image.png"/>
             <p:cNvSpPr/>
             <p:nvPr/>
           </p:nvSpPr>
@@ -6550,250 +6271,9 @@
           </p:spPr>
         </p:sp>
       </p:grpSp>
-      <p:sp>
-        <p:nvSpPr>
-          <p:cNvPr name="TextBox 10" id="10"/>
-          <p:cNvSpPr txBox="true"/>
-          <p:nvPr/>
-        </p:nvSpPr>
-        <p:spPr>
-          <a:xfrm rot="0">
-            <a:off x="1428750" y="4867275"/>
-            <a:ext cx="2438400" cy="495300"/>
-          </a:xfrm>
-          <a:prstGeom prst="rect">
-            <a:avLst/>
-          </a:prstGeom>
-        </p:spPr>
-        <p:txBody>
-          <a:bodyPr anchor="t" rtlCol="false" tIns="0" lIns="0" bIns="0" rIns="0">
-            <a:spAutoFit/>
-          </a:bodyPr>
-          <a:lstStyle/>
-          <a:p>
-            <a:pPr algn="l">
-              <a:lnSpc>
-                <a:spcPts val="3779"/>
-              </a:lnSpc>
-            </a:pPr>
-            <a:r>
-              <a:rPr lang="en-US" b="true" sz="3150">
-                <a:solidFill>
-                  <a:srgbClr val="2E7D32"/>
-                </a:solidFill>
-                <a:latin typeface="Poppins Bold"/>
-                <a:ea typeface="Poppins Bold"/>
-                <a:cs typeface="Poppins Bold"/>
-                <a:sym typeface="Poppins Bold"/>
-              </a:rPr>
-              <a:t> </a:t>
-            </a:r>
-            <a:r>
-              <a:rPr lang="en-US" b="true" sz="3150">
-                <a:solidFill>
-                  <a:srgbClr val="2E7D32"/>
-                </a:solidFill>
-                <a:latin typeface="Poppins Bold"/>
-                <a:ea typeface="Poppins Bold"/>
-                <a:cs typeface="Poppins Bold"/>
-                <a:sym typeface="Poppins Bold"/>
-              </a:rPr>
-              <a:t>Dynamic UI</a:t>
-            </a:r>
-          </a:p>
-        </p:txBody>
-      </p:sp>
-      <p:sp>
-        <p:nvSpPr>
-          <p:cNvPr name="TextBox 11" id="11"/>
-          <p:cNvSpPr txBox="true"/>
-          <p:nvPr/>
-        </p:nvSpPr>
-        <p:spPr>
-          <a:xfrm rot="0">
-            <a:off x="1428750" y="5538787"/>
-            <a:ext cx="4095902" cy="1042035"/>
-          </a:xfrm>
-          <a:prstGeom prst="rect">
-            <a:avLst/>
-          </a:prstGeom>
-        </p:spPr>
-        <p:txBody>
-          <a:bodyPr anchor="t" rtlCol="false" tIns="0" lIns="0" bIns="0" rIns="0">
-            <a:spAutoFit/>
-          </a:bodyPr>
-          <a:lstStyle/>
-          <a:p>
-            <a:pPr algn="l">
-              <a:lnSpc>
-                <a:spcPts val="4320"/>
-              </a:lnSpc>
-            </a:pPr>
-            <a:r>
-              <a:rPr lang="en-US" sz="2250">
-                <a:solidFill>
-                  <a:srgbClr val="334155"/>
-                </a:solidFill>
-                <a:latin typeface="Lato"/>
-                <a:ea typeface="Lato"/>
-                <a:cs typeface="Lato"/>
-                <a:sym typeface="Lato"/>
-              </a:rPr>
-              <a:t>Render content without page reloads.</a:t>
-            </a:r>
-          </a:p>
-        </p:txBody>
-      </p:sp>
-      <p:sp>
-        <p:nvSpPr>
-          <p:cNvPr name="TextBox 12" id="12"/>
-          <p:cNvSpPr txBox="true"/>
-          <p:nvPr/>
-        </p:nvSpPr>
-        <p:spPr>
-          <a:xfrm rot="0">
-            <a:off x="7096201" y="4867275"/>
-            <a:ext cx="3066058" cy="495300"/>
-          </a:xfrm>
-          <a:prstGeom prst="rect">
-            <a:avLst/>
-          </a:prstGeom>
-        </p:spPr>
-        <p:txBody>
-          <a:bodyPr anchor="t" rtlCol="false" tIns="0" lIns="0" bIns="0" rIns="0">
-            <a:spAutoFit/>
-          </a:bodyPr>
-          <a:lstStyle/>
-          <a:p>
-            <a:pPr algn="l">
-              <a:lnSpc>
-                <a:spcPts val="3779"/>
-              </a:lnSpc>
-            </a:pPr>
-            <a:r>
-              <a:rPr lang="en-US" b="true" sz="3150">
-                <a:solidFill>
-                  <a:srgbClr val="2E7D32"/>
-                </a:solidFill>
-                <a:latin typeface="Poppins Bold"/>
-                <a:ea typeface="Poppins Bold"/>
-                <a:cs typeface="Poppins Bold"/>
-                <a:sym typeface="Poppins Bold"/>
-              </a:rPr>
-              <a:t>Cart Workflow:</a:t>
-            </a:r>
-          </a:p>
-        </p:txBody>
-      </p:sp>
-      <p:sp>
-        <p:nvSpPr>
-          <p:cNvPr name="TextBox 13" id="13"/>
-          <p:cNvSpPr txBox="true"/>
-          <p:nvPr/>
-        </p:nvSpPr>
-        <p:spPr>
-          <a:xfrm rot="0">
-            <a:off x="7096201" y="5538787"/>
-            <a:ext cx="4095902" cy="1042035"/>
-          </a:xfrm>
-          <a:prstGeom prst="rect">
-            <a:avLst/>
-          </a:prstGeom>
-        </p:spPr>
-        <p:txBody>
-          <a:bodyPr anchor="t" rtlCol="false" tIns="0" lIns="0" bIns="0" rIns="0">
-            <a:spAutoFit/>
-          </a:bodyPr>
-          <a:lstStyle/>
-          <a:p>
-            <a:pPr algn="l">
-              <a:lnSpc>
-                <a:spcPts val="4320"/>
-              </a:lnSpc>
-            </a:pPr>
-            <a:r>
-              <a:rPr lang="en-US" sz="2250">
-                <a:solidFill>
-                  <a:srgbClr val="334155"/>
-                </a:solidFill>
-                <a:latin typeface="Lato"/>
-                <a:ea typeface="Lato"/>
-                <a:cs typeface="Lato"/>
-                <a:sym typeface="Lato"/>
-              </a:rPr>
-              <a:t>C</a:t>
-            </a:r>
-            <a:r>
-              <a:rPr lang="en-US" sz="2250">
-                <a:solidFill>
-                  <a:srgbClr val="334155"/>
-                </a:solidFill>
-                <a:latin typeface="Lato"/>
-                <a:ea typeface="Lato"/>
-                <a:cs typeface="Lato"/>
-                <a:sym typeface="Lato"/>
-              </a:rPr>
-              <a:t>omplete CRUD (Create, Read, Update, Delete) cycle.</a:t>
-            </a:r>
-          </a:p>
-        </p:txBody>
-      </p:sp>
-      <p:sp>
-        <p:nvSpPr>
-          <p:cNvPr name="TextBox 14" id="14"/>
-          <p:cNvSpPr txBox="true"/>
-          <p:nvPr/>
-        </p:nvSpPr>
-        <p:spPr>
-          <a:xfrm rot="0">
-            <a:off x="12763652" y="5538787"/>
-            <a:ext cx="4095902" cy="1042035"/>
-          </a:xfrm>
-          <a:prstGeom prst="rect">
-            <a:avLst/>
-          </a:prstGeom>
-        </p:spPr>
-        <p:txBody>
-          <a:bodyPr anchor="t" rtlCol="false" tIns="0" lIns="0" bIns="0" rIns="0">
-            <a:spAutoFit/>
-          </a:bodyPr>
-          <a:lstStyle/>
-          <a:p>
-            <a:pPr algn="l">
-              <a:lnSpc>
-                <a:spcPts val="4320"/>
-              </a:lnSpc>
-            </a:pPr>
-            <a:r>
-              <a:rPr lang="en-US" sz="2250">
-                <a:solidFill>
-                  <a:srgbClr val="334155"/>
-                </a:solidFill>
-                <a:latin typeface="Lato"/>
-                <a:ea typeface="Lato"/>
-                <a:cs typeface="Lato"/>
-                <a:sym typeface="Lato"/>
-              </a:rPr>
-              <a:t>F</a:t>
-            </a:r>
-            <a:r>
-              <a:rPr lang="en-US" sz="2250">
-                <a:solidFill>
-                  <a:srgbClr val="334155"/>
-                </a:solidFill>
-                <a:latin typeface="Lato"/>
-                <a:ea typeface="Lato"/>
-                <a:cs typeface="Lato"/>
-                <a:sym typeface="Lato"/>
-              </a:rPr>
-              <a:t>ocus on XSS-safe code architecture.</a:t>
-            </a:r>
-          </a:p>
-        </p:txBody>
-      </p:sp>
       <p:grpSp>
         <p:nvGrpSpPr>
-          <p:cNvPr name="Group 15" id="15"/>
+          <p:cNvPr name="Group 9" id="9"/>
           <p:cNvGrpSpPr/>
           <p:nvPr/>
         </p:nvGrpSpPr>
@@ -6807,7 +6287,7 @@
         </p:grpSpPr>
         <p:sp>
           <p:nvSpPr>
-            <p:cNvPr name="Freeform 16" id="16" descr="image.png"/>
+            <p:cNvPr name="Freeform 10" id="10" descr="image.png"/>
             <p:cNvSpPr/>
             <p:nvPr/>
           </p:nvSpPr>
@@ -6854,7 +6334,7 @@
       </p:grpSp>
       <p:grpSp>
         <p:nvGrpSpPr>
-          <p:cNvPr name="Group 17" id="17"/>
+          <p:cNvPr name="Group 11" id="11"/>
           <p:cNvGrpSpPr/>
           <p:nvPr/>
         </p:nvGrpSpPr>
@@ -6868,7 +6348,7 @@
         </p:grpSpPr>
         <p:sp>
           <p:nvSpPr>
-            <p:cNvPr name="Freeform 18" id="18" descr="image.png"/>
+            <p:cNvPr name="Freeform 12" id="12" descr="image.png"/>
             <p:cNvSpPr/>
             <p:nvPr/>
           </p:nvSpPr>
@@ -6915,7 +6395,7 @@
       </p:grpSp>
       <p:grpSp>
         <p:nvGrpSpPr>
-          <p:cNvPr name="Group 19" id="19"/>
+          <p:cNvPr name="Group 13" id="13"/>
           <p:cNvGrpSpPr/>
           <p:nvPr/>
         </p:nvGrpSpPr>
@@ -6929,7 +6409,7 @@
         </p:grpSpPr>
         <p:sp>
           <p:nvSpPr>
-            <p:cNvPr name="Freeform 20" id="20" descr="image.png"/>
+            <p:cNvPr name="Freeform 14" id="14" descr="image.png"/>
             <p:cNvSpPr/>
             <p:nvPr/>
           </p:nvSpPr>
@@ -6974,50 +6454,9 @@
           </p:spPr>
         </p:sp>
       </p:grpSp>
-      <p:sp>
-        <p:nvSpPr>
-          <p:cNvPr name="TextBox 21" id="21"/>
-          <p:cNvSpPr txBox="true"/>
-          <p:nvPr/>
-        </p:nvSpPr>
-        <p:spPr>
-          <a:xfrm rot="0">
-            <a:off x="1143000" y="809625"/>
-            <a:ext cx="5050929" cy="695325"/>
-          </a:xfrm>
-          <a:prstGeom prst="rect">
-            <a:avLst/>
-          </a:prstGeom>
-        </p:spPr>
-        <p:txBody>
-          <a:bodyPr anchor="t" rtlCol="false" tIns="0" lIns="0" bIns="0" rIns="0">
-            <a:spAutoFit/>
-          </a:bodyPr>
-          <a:lstStyle/>
-          <a:p>
-            <a:pPr algn="l">
-              <a:lnSpc>
-                <a:spcPts val="5130"/>
-              </a:lnSpc>
-            </a:pPr>
-            <a:r>
-              <a:rPr lang="en-US" b="true" sz="4275">
-                <a:solidFill>
-                  <a:srgbClr val="1B5E20"/>
-                </a:solidFill>
-                <a:latin typeface="Poppins Bold"/>
-                <a:ea typeface="Poppins Bold"/>
-                <a:cs typeface="Poppins Bold"/>
-                <a:sym typeface="Poppins Bold"/>
-              </a:rPr>
-              <a:t>Project Objectives</a:t>
-            </a:r>
-          </a:p>
-        </p:txBody>
-      </p:sp>
       <p:grpSp>
         <p:nvGrpSpPr>
-          <p:cNvPr name="Group 22" id="22"/>
+          <p:cNvPr name="Group 15" id="15"/>
           <p:cNvGrpSpPr/>
           <p:nvPr/>
         </p:nvGrpSpPr>
@@ -7031,7 +6470,7 @@
         </p:grpSpPr>
         <p:sp>
           <p:nvSpPr>
-            <p:cNvPr name="Freeform 23" id="23"/>
+            <p:cNvPr name="Freeform 16" id="16"/>
             <p:cNvSpPr/>
             <p:nvPr/>
           </p:nvSpPr>
@@ -7072,7 +6511,289 @@
       </p:grpSp>
       <p:sp>
         <p:nvSpPr>
-          <p:cNvPr name="TextBox 24" id="24"/>
+          <p:cNvPr name="TextBox 17" id="17"/>
+          <p:cNvSpPr txBox="true"/>
+          <p:nvPr/>
+        </p:nvSpPr>
+        <p:spPr>
+          <a:xfrm rot="0">
+            <a:off x="1428750" y="4867275"/>
+            <a:ext cx="2438400" cy="495300"/>
+          </a:xfrm>
+          <a:prstGeom prst="rect">
+            <a:avLst/>
+          </a:prstGeom>
+        </p:spPr>
+        <p:txBody>
+          <a:bodyPr anchor="t" rtlCol="false" tIns="0" lIns="0" bIns="0" rIns="0">
+            <a:spAutoFit/>
+          </a:bodyPr>
+          <a:lstStyle/>
+          <a:p>
+            <a:pPr algn="l">
+              <a:lnSpc>
+                <a:spcPts val="3779"/>
+              </a:lnSpc>
+            </a:pPr>
+            <a:r>
+              <a:rPr lang="en-US" b="true" sz="3150">
+                <a:solidFill>
+                  <a:srgbClr val="2E7D32"/>
+                </a:solidFill>
+                <a:latin typeface="Poppins Bold"/>
+                <a:ea typeface="Poppins Bold"/>
+                <a:cs typeface="Poppins Bold"/>
+                <a:sym typeface="Poppins Bold"/>
+              </a:rPr>
+              <a:t> </a:t>
+            </a:r>
+            <a:r>
+              <a:rPr lang="en-US" b="true" sz="3150">
+                <a:solidFill>
+                  <a:srgbClr val="2E7D32"/>
+                </a:solidFill>
+                <a:latin typeface="Poppins Bold"/>
+                <a:ea typeface="Poppins Bold"/>
+                <a:cs typeface="Poppins Bold"/>
+                <a:sym typeface="Poppins Bold"/>
+              </a:rPr>
+              <a:t>Dynamic UI</a:t>
+            </a:r>
+          </a:p>
+        </p:txBody>
+      </p:sp>
+      <p:sp>
+        <p:nvSpPr>
+          <p:cNvPr name="TextBox 18" id="18"/>
+          <p:cNvSpPr txBox="true"/>
+          <p:nvPr/>
+        </p:nvSpPr>
+        <p:spPr>
+          <a:xfrm rot="0">
+            <a:off x="1428750" y="5538787"/>
+            <a:ext cx="4095902" cy="1042035"/>
+          </a:xfrm>
+          <a:prstGeom prst="rect">
+            <a:avLst/>
+          </a:prstGeom>
+        </p:spPr>
+        <p:txBody>
+          <a:bodyPr anchor="t" rtlCol="false" tIns="0" lIns="0" bIns="0" rIns="0">
+            <a:spAutoFit/>
+          </a:bodyPr>
+          <a:lstStyle/>
+          <a:p>
+            <a:pPr algn="l">
+              <a:lnSpc>
+                <a:spcPts val="4320"/>
+              </a:lnSpc>
+            </a:pPr>
+            <a:r>
+              <a:rPr lang="en-US" sz="2250">
+                <a:solidFill>
+                  <a:srgbClr val="334155"/>
+                </a:solidFill>
+                <a:latin typeface="Lato"/>
+                <a:ea typeface="Lato"/>
+                <a:cs typeface="Lato"/>
+                <a:sym typeface="Lato"/>
+              </a:rPr>
+              <a:t>Render content without page reloads.</a:t>
+            </a:r>
+          </a:p>
+        </p:txBody>
+      </p:sp>
+      <p:sp>
+        <p:nvSpPr>
+          <p:cNvPr name="TextBox 19" id="19"/>
+          <p:cNvSpPr txBox="true"/>
+          <p:nvPr/>
+        </p:nvSpPr>
+        <p:spPr>
+          <a:xfrm rot="0">
+            <a:off x="7096201" y="4867275"/>
+            <a:ext cx="3066058" cy="495300"/>
+          </a:xfrm>
+          <a:prstGeom prst="rect">
+            <a:avLst/>
+          </a:prstGeom>
+        </p:spPr>
+        <p:txBody>
+          <a:bodyPr anchor="t" rtlCol="false" tIns="0" lIns="0" bIns="0" rIns="0">
+            <a:spAutoFit/>
+          </a:bodyPr>
+          <a:lstStyle/>
+          <a:p>
+            <a:pPr algn="l">
+              <a:lnSpc>
+                <a:spcPts val="3779"/>
+              </a:lnSpc>
+            </a:pPr>
+            <a:r>
+              <a:rPr lang="en-US" b="true" sz="3150">
+                <a:solidFill>
+                  <a:srgbClr val="2E7D32"/>
+                </a:solidFill>
+                <a:latin typeface="Poppins Bold"/>
+                <a:ea typeface="Poppins Bold"/>
+                <a:cs typeface="Poppins Bold"/>
+                <a:sym typeface="Poppins Bold"/>
+              </a:rPr>
+              <a:t>Cart Workflow:</a:t>
+            </a:r>
+          </a:p>
+        </p:txBody>
+      </p:sp>
+      <p:sp>
+        <p:nvSpPr>
+          <p:cNvPr name="TextBox 20" id="20"/>
+          <p:cNvSpPr txBox="true"/>
+          <p:nvPr/>
+        </p:nvSpPr>
+        <p:spPr>
+          <a:xfrm rot="0">
+            <a:off x="7096201" y="5538787"/>
+            <a:ext cx="4095902" cy="1042035"/>
+          </a:xfrm>
+          <a:prstGeom prst="rect">
+            <a:avLst/>
+          </a:prstGeom>
+        </p:spPr>
+        <p:txBody>
+          <a:bodyPr anchor="t" rtlCol="false" tIns="0" lIns="0" bIns="0" rIns="0">
+            <a:spAutoFit/>
+          </a:bodyPr>
+          <a:lstStyle/>
+          <a:p>
+            <a:pPr algn="l">
+              <a:lnSpc>
+                <a:spcPts val="4320"/>
+              </a:lnSpc>
+            </a:pPr>
+            <a:r>
+              <a:rPr lang="en-US" sz="2250">
+                <a:solidFill>
+                  <a:srgbClr val="334155"/>
+                </a:solidFill>
+                <a:latin typeface="Lato"/>
+                <a:ea typeface="Lato"/>
+                <a:cs typeface="Lato"/>
+                <a:sym typeface="Lato"/>
+              </a:rPr>
+              <a:t>C</a:t>
+            </a:r>
+            <a:r>
+              <a:rPr lang="en-US" sz="2250">
+                <a:solidFill>
+                  <a:srgbClr val="334155"/>
+                </a:solidFill>
+                <a:latin typeface="Lato"/>
+                <a:ea typeface="Lato"/>
+                <a:cs typeface="Lato"/>
+                <a:sym typeface="Lato"/>
+              </a:rPr>
+              <a:t>omplete CRUD (Create, Read, Update, Delete) cycle.</a:t>
+            </a:r>
+          </a:p>
+        </p:txBody>
+      </p:sp>
+      <p:sp>
+        <p:nvSpPr>
+          <p:cNvPr name="TextBox 21" id="21"/>
+          <p:cNvSpPr txBox="true"/>
+          <p:nvPr/>
+        </p:nvSpPr>
+        <p:spPr>
+          <a:xfrm rot="0">
+            <a:off x="12763652" y="5538787"/>
+            <a:ext cx="4095902" cy="1042035"/>
+          </a:xfrm>
+          <a:prstGeom prst="rect">
+            <a:avLst/>
+          </a:prstGeom>
+        </p:spPr>
+        <p:txBody>
+          <a:bodyPr anchor="t" rtlCol="false" tIns="0" lIns="0" bIns="0" rIns="0">
+            <a:spAutoFit/>
+          </a:bodyPr>
+          <a:lstStyle/>
+          <a:p>
+            <a:pPr algn="l">
+              <a:lnSpc>
+                <a:spcPts val="4320"/>
+              </a:lnSpc>
+            </a:pPr>
+            <a:r>
+              <a:rPr lang="en-US" sz="2250">
+                <a:solidFill>
+                  <a:srgbClr val="334155"/>
+                </a:solidFill>
+                <a:latin typeface="Lato"/>
+                <a:ea typeface="Lato"/>
+                <a:cs typeface="Lato"/>
+                <a:sym typeface="Lato"/>
+              </a:rPr>
+              <a:t>F</a:t>
+            </a:r>
+            <a:r>
+              <a:rPr lang="en-US" sz="2250">
+                <a:solidFill>
+                  <a:srgbClr val="334155"/>
+                </a:solidFill>
+                <a:latin typeface="Lato"/>
+                <a:ea typeface="Lato"/>
+                <a:cs typeface="Lato"/>
+                <a:sym typeface="Lato"/>
+              </a:rPr>
+              <a:t>ocus on XSS-safe code architecture.</a:t>
+            </a:r>
+          </a:p>
+        </p:txBody>
+      </p:sp>
+      <p:sp>
+        <p:nvSpPr>
+          <p:cNvPr name="TextBox 22" id="22"/>
+          <p:cNvSpPr txBox="true"/>
+          <p:nvPr/>
+        </p:nvSpPr>
+        <p:spPr>
+          <a:xfrm rot="0">
+            <a:off x="1143000" y="809625"/>
+            <a:ext cx="5907485" cy="809625"/>
+          </a:xfrm>
+          <a:prstGeom prst="rect">
+            <a:avLst/>
+          </a:prstGeom>
+        </p:spPr>
+        <p:txBody>
+          <a:bodyPr anchor="t" rtlCol="false" tIns="0" lIns="0" bIns="0" rIns="0">
+            <a:spAutoFit/>
+          </a:bodyPr>
+          <a:lstStyle/>
+          <a:p>
+            <a:pPr algn="l">
+              <a:lnSpc>
+                <a:spcPts val="6000"/>
+              </a:lnSpc>
+            </a:pPr>
+            <a:r>
+              <a:rPr lang="en-US" b="true" sz="5000">
+                <a:solidFill>
+                  <a:srgbClr val="1B5E20"/>
+                </a:solidFill>
+                <a:latin typeface="Poppins Bold"/>
+                <a:ea typeface="Poppins Bold"/>
+                <a:cs typeface="Poppins Bold"/>
+                <a:sym typeface="Poppins Bold"/>
+              </a:rPr>
+              <a:t>Project Objectives</a:t>
+            </a:r>
+          </a:p>
+        </p:txBody>
+      </p:sp>
+      <p:sp>
+        <p:nvSpPr>
+          <p:cNvPr name="TextBox 23" id="23"/>
           <p:cNvSpPr txBox="true"/>
           <p:nvPr/>
         </p:nvSpPr>
@@ -7151,70 +6872,55 @@
           <a:chExt cx="0" cy="0"/>
         </a:xfrm>
       </p:grpSpPr>
+      <p:sp>
+        <p:nvSpPr>
+          <p:cNvPr name="Freeform 2" id="2"/>
+          <p:cNvSpPr/>
+          <p:nvPr/>
+        </p:nvSpPr>
+        <p:spPr>
+          <a:xfrm flipH="false" flipV="false" rot="0">
+            <a:off x="0" y="0"/>
+            <a:ext cx="18288000" cy="10287000"/>
+          </a:xfrm>
+          <a:custGeom>
+            <a:avLst/>
+            <a:gdLst/>
+            <a:ahLst/>
+            <a:cxnLst/>
+            <a:rect r="r" b="b" t="t" l="l"/>
+            <a:pathLst>
+              <a:path h="10287000" w="18288000">
+                <a:moveTo>
+                  <a:pt x="0" y="0"/>
+                </a:moveTo>
+                <a:lnTo>
+                  <a:pt x="18288000" y="0"/>
+                </a:lnTo>
+                <a:lnTo>
+                  <a:pt x="18288000" y="10287000"/>
+                </a:lnTo>
+                <a:lnTo>
+                  <a:pt x="0" y="10287000"/>
+                </a:lnTo>
+                <a:lnTo>
+                  <a:pt x="0" y="0"/>
+                </a:lnTo>
+                <a:close/>
+              </a:path>
+            </a:pathLst>
+          </a:custGeom>
+          <a:blipFill>
+            <a:blip r:embed="rId3"/>
+            <a:stretch>
+              <a:fillRect l="0" t="-9222" r="0" b="-9222"/>
+            </a:stretch>
+          </a:blipFill>
+        </p:spPr>
+      </p:sp>
       <p:grpSp>
         <p:nvGrpSpPr>
-          <p:cNvPr name="Group 2" id="2"/>
-          <p:cNvGrpSpPr/>
-          <p:nvPr/>
-        </p:nvGrpSpPr>
-        <p:grpSpPr>
-          <a:xfrm rot="0">
-            <a:off x="0" y="0"/>
-            <a:ext cx="18288000" cy="10287000"/>
-            <a:chOff x="0" y="0"/>
-            <a:chExt cx="24384000" cy="13716000"/>
-          </a:xfrm>
-        </p:grpSpPr>
-        <p:sp>
-          <p:nvSpPr>
-            <p:cNvPr name="Freeform 3" id="3" descr="image.png"/>
-            <p:cNvSpPr/>
-            <p:nvPr/>
-          </p:nvSpPr>
-          <p:spPr>
-            <a:xfrm flipH="false" flipV="false" rot="0">
-              <a:off x="0" y="0"/>
-              <a:ext cx="24384000" cy="13716000"/>
-            </a:xfrm>
-            <a:custGeom>
-              <a:avLst/>
-              <a:gdLst/>
-              <a:ahLst/>
-              <a:cxnLst/>
-              <a:rect r="r" b="b" t="t" l="l"/>
-              <a:pathLst>
-                <a:path h="13716000" w="24384000">
-                  <a:moveTo>
-                    <a:pt x="0" y="0"/>
-                  </a:moveTo>
-                  <a:lnTo>
-                    <a:pt x="24384000" y="0"/>
-                  </a:lnTo>
-                  <a:lnTo>
-                    <a:pt x="24384000" y="13716000"/>
-                  </a:lnTo>
-                  <a:lnTo>
-                    <a:pt x="0" y="13716000"/>
-                  </a:lnTo>
-                  <a:lnTo>
-                    <a:pt x="0" y="0"/>
-                  </a:lnTo>
-                  <a:close/>
-                </a:path>
-              </a:pathLst>
-            </a:custGeom>
-            <a:blipFill>
-              <a:blip r:embed="rId3"/>
-              <a:stretch>
-                <a:fillRect l="0" t="0" r="0" b="0"/>
-              </a:stretch>
-            </a:blipFill>
-          </p:spPr>
-        </p:sp>
-      </p:grpSp>
-      <p:grpSp>
-        <p:nvGrpSpPr>
-          <p:cNvPr name="Group 4" id="4"/>
+          <p:cNvPr name="Group 3" id="3"/>
           <p:cNvGrpSpPr/>
           <p:nvPr/>
         </p:nvGrpSpPr>
@@ -7228,7 +6934,7 @@
         </p:grpSpPr>
         <p:sp>
           <p:nvSpPr>
-            <p:cNvPr name="Freeform 5" id="5" descr="image.png"/>
+            <p:cNvPr name="Freeform 4" id="4" descr="image.png"/>
             <p:cNvSpPr/>
             <p:nvPr/>
           </p:nvSpPr>
@@ -7275,7 +6981,7 @@
       </p:grpSp>
       <p:sp>
         <p:nvSpPr>
-          <p:cNvPr name="TextBox 6" id="6"/>
+          <p:cNvPr name="TextBox 5" id="5"/>
           <p:cNvSpPr txBox="true"/>
           <p:nvPr/>
         </p:nvSpPr>
@@ -7328,7 +7034,7 @@
       </p:sp>
       <p:sp>
         <p:nvSpPr>
-          <p:cNvPr name="TextBox 7" id="7"/>
+          <p:cNvPr name="TextBox 6" id="6"/>
           <p:cNvSpPr txBox="true"/>
           <p:nvPr/>
         </p:nvSpPr>
@@ -7501,7 +7207,7 @@
       </p:sp>
       <p:sp>
         <p:nvSpPr>
-          <p:cNvPr name="TextBox 8" id="8"/>
+          <p:cNvPr name="TextBox 7" id="7"/>
           <p:cNvSpPr txBox="true"/>
           <p:nvPr/>
         </p:nvSpPr>
@@ -7614,7 +7320,7 @@
       </p:sp>
       <p:grpSp>
         <p:nvGrpSpPr>
-          <p:cNvPr name="Group 9" id="9"/>
+          <p:cNvPr name="Group 8" id="8"/>
           <p:cNvGrpSpPr/>
           <p:nvPr/>
         </p:nvGrpSpPr>
@@ -7628,7 +7334,7 @@
         </p:grpSpPr>
         <p:sp>
           <p:nvSpPr>
-            <p:cNvPr name="Freeform 10" id="10" descr="image.png"/>
+            <p:cNvPr name="Freeform 9" id="9" descr="image.png"/>
             <p:cNvSpPr/>
             <p:nvPr/>
           </p:nvSpPr>
@@ -7675,7 +7381,7 @@
       </p:grpSp>
       <p:grpSp>
         <p:nvGrpSpPr>
-          <p:cNvPr name="Group 11" id="11"/>
+          <p:cNvPr name="Group 10" id="10"/>
           <p:cNvGrpSpPr/>
           <p:nvPr/>
         </p:nvGrpSpPr>
@@ -7689,7 +7395,7 @@
         </p:grpSpPr>
         <p:sp>
           <p:nvSpPr>
-            <p:cNvPr name="Freeform 12" id="12" descr="image.png"/>
+            <p:cNvPr name="Freeform 11" id="11" descr="image.png"/>
             <p:cNvSpPr/>
             <p:nvPr/>
           </p:nvSpPr>
@@ -7736,7 +7442,7 @@
       </p:grpSp>
       <p:grpSp>
         <p:nvGrpSpPr>
-          <p:cNvPr name="Group 13" id="13"/>
+          <p:cNvPr name="Group 12" id="12"/>
           <p:cNvGrpSpPr/>
           <p:nvPr/>
         </p:nvGrpSpPr>
@@ -7750,7 +7456,7 @@
         </p:grpSpPr>
         <p:sp>
           <p:nvSpPr>
-            <p:cNvPr name="Freeform 14" id="14" descr="image.png"/>
+            <p:cNvPr name="Freeform 13" id="13" descr="image.png"/>
             <p:cNvSpPr/>
             <p:nvPr/>
           </p:nvSpPr>
@@ -7797,14 +7503,14 @@
       </p:grpSp>
       <p:sp>
         <p:nvSpPr>
-          <p:cNvPr name="TextBox 15" id="15"/>
+          <p:cNvPr name="TextBox 14" id="14"/>
           <p:cNvSpPr txBox="true"/>
           <p:nvPr/>
         </p:nvSpPr>
         <p:spPr>
           <a:xfrm rot="0">
             <a:off x="1143000" y="809625"/>
-            <a:ext cx="17102252" cy="705526"/>
+            <a:ext cx="5960765" cy="809625"/>
           </a:xfrm>
           <a:prstGeom prst="rect">
             <a:avLst/>
@@ -7818,11 +7524,11 @@
           <a:p>
             <a:pPr algn="l">
               <a:lnSpc>
-                <a:spcPts val="5130"/>
+                <a:spcPts val="6000"/>
               </a:lnSpc>
             </a:pPr>
             <a:r>
-              <a:rPr lang="en-US" b="true" sz="4275">
+              <a:rPr lang="en-US" b="true" sz="5000">
                 <a:solidFill>
                   <a:srgbClr val="1B5E20"/>
                 </a:solidFill>
@@ -7838,7 +7544,7 @@
       </p:sp>
       <p:grpSp>
         <p:nvGrpSpPr>
-          <p:cNvPr name="Group 16" id="16"/>
+          <p:cNvPr name="Group 15" id="15"/>
           <p:cNvGrpSpPr/>
           <p:nvPr/>
         </p:nvGrpSpPr>
@@ -7852,7 +7558,7 @@
         </p:grpSpPr>
         <p:sp>
           <p:nvSpPr>
-            <p:cNvPr name="Freeform 17" id="17"/>
+            <p:cNvPr name="Freeform 16" id="16"/>
             <p:cNvSpPr/>
             <p:nvPr/>
           </p:nvSpPr>
@@ -7893,7 +7599,7 @@
       </p:grpSp>
       <p:grpSp>
         <p:nvGrpSpPr>
-          <p:cNvPr name="Group 18" id="18"/>
+          <p:cNvPr name="Group 17" id="17"/>
           <p:cNvGrpSpPr/>
           <p:nvPr/>
         </p:nvGrpSpPr>
@@ -7907,7 +7613,7 @@
         </p:grpSpPr>
         <p:sp>
           <p:nvSpPr>
-            <p:cNvPr name="Freeform 19" id="19"/>
+            <p:cNvPr name="Freeform 18" id="18"/>
             <p:cNvSpPr/>
             <p:nvPr/>
           </p:nvSpPr>
@@ -7980,30 +7686,76 @@
           <a:chExt cx="0" cy="0"/>
         </a:xfrm>
       </p:grpSpPr>
+      <p:sp>
+        <p:nvSpPr>
+          <p:cNvPr name="Freeform 2" id="2"/>
+          <p:cNvSpPr/>
+          <p:nvPr/>
+        </p:nvSpPr>
+        <p:spPr>
+          <a:xfrm flipH="false" flipV="false" rot="0">
+            <a:off x="0" y="0"/>
+            <a:ext cx="18288000" cy="10287000"/>
+          </a:xfrm>
+          <a:custGeom>
+            <a:avLst/>
+            <a:gdLst/>
+            <a:ahLst/>
+            <a:cxnLst/>
+            <a:rect r="r" b="b" t="t" l="l"/>
+            <a:pathLst>
+              <a:path h="10287000" w="18288000">
+                <a:moveTo>
+                  <a:pt x="0" y="0"/>
+                </a:moveTo>
+                <a:lnTo>
+                  <a:pt x="18288000" y="0"/>
+                </a:lnTo>
+                <a:lnTo>
+                  <a:pt x="18288000" y="10287000"/>
+                </a:lnTo>
+                <a:lnTo>
+                  <a:pt x="0" y="10287000"/>
+                </a:lnTo>
+                <a:lnTo>
+                  <a:pt x="0" y="0"/>
+                </a:lnTo>
+                <a:close/>
+              </a:path>
+            </a:pathLst>
+          </a:custGeom>
+          <a:blipFill>
+            <a:blip r:embed="rId3"/>
+            <a:stretch>
+              <a:fillRect l="0" t="-9222" r="0" b="-9222"/>
+            </a:stretch>
+          </a:blipFill>
+        </p:spPr>
+      </p:sp>
       <p:grpSp>
         <p:nvGrpSpPr>
-          <p:cNvPr name="Group 2" id="2"/>
+          <p:cNvPr name="Group 3" id="3"/>
           <p:cNvGrpSpPr/>
           <p:nvPr/>
         </p:nvGrpSpPr>
         <p:grpSpPr>
           <a:xfrm rot="0">
-            <a:off x="0" y="0"/>
-            <a:ext cx="18288000" cy="10287000"/>
+            <a:off x="375714" y="2948770"/>
+            <a:ext cx="8444381" cy="5471697"/>
             <a:chOff x="0" y="0"/>
-            <a:chExt cx="24384000" cy="13716000"/>
+            <a:chExt cx="9215757" cy="5971525"/>
           </a:xfrm>
         </p:grpSpPr>
         <p:sp>
           <p:nvSpPr>
-            <p:cNvPr name="Freeform 3" id="3" descr="image.png"/>
+            <p:cNvPr name="Freeform 4" id="4" descr="image.png"/>
             <p:cNvSpPr/>
             <p:nvPr/>
           </p:nvSpPr>
           <p:spPr>
             <a:xfrm flipH="false" flipV="false" rot="0">
               <a:off x="0" y="0"/>
-              <a:ext cx="24384000" cy="13716000"/>
+              <a:ext cx="9215757" cy="5971525"/>
             </a:xfrm>
             <a:custGeom>
               <a:avLst/>
@@ -8012,79 +7764,18 @@
               <a:cxnLst/>
               <a:rect r="r" b="b" t="t" l="l"/>
               <a:pathLst>
-                <a:path h="13716000" w="24384000">
+                <a:path h="5971525" w="9215757">
                   <a:moveTo>
                     <a:pt x="0" y="0"/>
                   </a:moveTo>
                   <a:lnTo>
-                    <a:pt x="24384000" y="0"/>
+                    <a:pt x="9215757" y="0"/>
                   </a:lnTo>
                   <a:lnTo>
-                    <a:pt x="24384000" y="13716000"/>
+                    <a:pt x="9215757" y="5971525"/>
                   </a:lnTo>
                   <a:lnTo>
-                    <a:pt x="0" y="13716000"/>
-                  </a:lnTo>
-                  <a:lnTo>
-                    <a:pt x="0" y="0"/>
-                  </a:lnTo>
-                  <a:close/>
-                </a:path>
-              </a:pathLst>
-            </a:custGeom>
-            <a:blipFill>
-              <a:blip r:embed="rId3"/>
-              <a:stretch>
-                <a:fillRect l="0" t="0" r="0" b="0"/>
-              </a:stretch>
-            </a:blipFill>
-          </p:spPr>
-        </p:sp>
-      </p:grpSp>
-      <p:grpSp>
-        <p:nvGrpSpPr>
-          <p:cNvPr name="Group 4" id="4"/>
-          <p:cNvGrpSpPr/>
-          <p:nvPr/>
-        </p:nvGrpSpPr>
-        <p:grpSpPr>
-          <a:xfrm rot="0">
-            <a:off x="857250" y="3171825"/>
-            <a:ext cx="8001000" cy="5186362"/>
-            <a:chOff x="0" y="0"/>
-            <a:chExt cx="10668000" cy="6915150"/>
-          </a:xfrm>
-        </p:grpSpPr>
-        <p:sp>
-          <p:nvSpPr>
-            <p:cNvPr name="Freeform 5" id="5" descr="image.png"/>
-            <p:cNvSpPr/>
-            <p:nvPr/>
-          </p:nvSpPr>
-          <p:spPr>
-            <a:xfrm flipH="false" flipV="false" rot="0">
-              <a:off x="0" y="0"/>
-              <a:ext cx="10668000" cy="6915150"/>
-            </a:xfrm>
-            <a:custGeom>
-              <a:avLst/>
-              <a:gdLst/>
-              <a:ahLst/>
-              <a:cxnLst/>
-              <a:rect r="r" b="b" t="t" l="l"/>
-              <a:pathLst>
-                <a:path h="6915150" w="10668000">
-                  <a:moveTo>
-                    <a:pt x="0" y="0"/>
-                  </a:moveTo>
-                  <a:lnTo>
-                    <a:pt x="10668000" y="0"/>
-                  </a:lnTo>
-                  <a:lnTo>
-                    <a:pt x="10668000" y="6915150"/>
-                  </a:lnTo>
-                  <a:lnTo>
-                    <a:pt x="0" y="6915150"/>
+                    <a:pt x="0" y="5971525"/>
                   </a:lnTo>
                   <a:lnTo>
                     <a:pt x="0" y="0"/>
@@ -8096,83 +7787,22 @@
             <a:blipFill>
               <a:blip r:embed="rId4"/>
               <a:stretch>
-                <a:fillRect l="0" t="0" r="0" b="0"/>
+                <a:fillRect l="0" t="-18" r="0" b="-18"/>
               </a:stretch>
             </a:blipFill>
           </p:spPr>
         </p:sp>
       </p:grpSp>
-      <p:grpSp>
-        <p:nvGrpSpPr>
-          <p:cNvPr name="Group 6" id="6"/>
-          <p:cNvGrpSpPr/>
-          <p:nvPr/>
-        </p:nvGrpSpPr>
-        <p:grpSpPr>
-          <a:xfrm rot="0">
-            <a:off x="9429750" y="3171825"/>
-            <a:ext cx="8001000" cy="5186362"/>
-            <a:chOff x="0" y="0"/>
-            <a:chExt cx="10668000" cy="6915150"/>
-          </a:xfrm>
-        </p:grpSpPr>
-        <p:sp>
-          <p:nvSpPr>
-            <p:cNvPr name="Freeform 7" id="7" descr="image.png"/>
-            <p:cNvSpPr/>
-            <p:nvPr/>
-          </p:nvSpPr>
-          <p:spPr>
-            <a:xfrm flipH="false" flipV="false" rot="0">
-              <a:off x="0" y="0"/>
-              <a:ext cx="10668000" cy="6915150"/>
-            </a:xfrm>
-            <a:custGeom>
-              <a:avLst/>
-              <a:gdLst/>
-              <a:ahLst/>
-              <a:cxnLst/>
-              <a:rect r="r" b="b" t="t" l="l"/>
-              <a:pathLst>
-                <a:path h="6915150" w="10668000">
-                  <a:moveTo>
-                    <a:pt x="0" y="0"/>
-                  </a:moveTo>
-                  <a:lnTo>
-                    <a:pt x="10668000" y="0"/>
-                  </a:lnTo>
-                  <a:lnTo>
-                    <a:pt x="10668000" y="6915150"/>
-                  </a:lnTo>
-                  <a:lnTo>
-                    <a:pt x="0" y="6915150"/>
-                  </a:lnTo>
-                  <a:lnTo>
-                    <a:pt x="0" y="0"/>
-                  </a:lnTo>
-                  <a:close/>
-                </a:path>
-              </a:pathLst>
-            </a:custGeom>
-            <a:blipFill>
-              <a:blip r:embed="rId4"/>
-              <a:stretch>
-                <a:fillRect l="0" t="0" r="0" b="0"/>
-              </a:stretch>
-            </a:blipFill>
-          </p:spPr>
-        </p:sp>
-      </p:grpSp>
-      <p:sp>
-        <p:nvSpPr>
-          <p:cNvPr name="TextBox 8" id="8"/>
+      <p:sp>
+        <p:nvSpPr>
+          <p:cNvPr name="TextBox 5" id="5"/>
           <p:cNvSpPr txBox="true"/>
           <p:nvPr/>
         </p:nvSpPr>
         <p:spPr>
           <a:xfrm rot="0">
-            <a:off x="1301733" y="4146886"/>
-            <a:ext cx="7556517" cy="3516064"/>
+            <a:off x="1028700" y="3246218"/>
+            <a:ext cx="6863832" cy="4838700"/>
           </a:xfrm>
           <a:prstGeom prst="rect">
             <a:avLst/>
@@ -8186,11 +7816,11 @@
           <a:p>
             <a:pPr algn="l">
               <a:lnSpc>
-                <a:spcPts val="3075"/>
+                <a:spcPts val="4200"/>
               </a:lnSpc>
             </a:pPr>
             <a:r>
-              <a:rPr lang="en-US" sz="2562" b="true">
+              <a:rPr lang="en-US" sz="3500" b="true">
                 <a:solidFill>
                   <a:srgbClr val="2E7D32"/>
                 </a:solidFill>
@@ -8205,11 +7835,11 @@
           <a:p>
             <a:pPr algn="l">
               <a:lnSpc>
-                <a:spcPts val="3075"/>
+                <a:spcPts val="4200"/>
               </a:lnSpc>
             </a:pPr>
             <a:r>
-              <a:rPr lang="en-US" sz="2562" b="true">
+              <a:rPr lang="en-US" sz="3500" b="true">
                 <a:solidFill>
                   <a:srgbClr val="2E7D32"/>
                 </a:solidFill>
@@ -8224,11 +7854,11 @@
           <a:p>
             <a:pPr algn="l">
               <a:lnSpc>
-                <a:spcPts val="3075"/>
+                <a:spcPts val="4200"/>
               </a:lnSpc>
             </a:pPr>
             <a:r>
-              <a:rPr lang="en-US" b="true" sz="2562">
+              <a:rPr lang="en-US" b="true" sz="3500">
                 <a:solidFill>
                   <a:srgbClr val="2E7D32"/>
                 </a:solidFill>
@@ -8240,7 +7870,7 @@
               <a:t>       </a:t>
             </a:r>
             <a:r>
-              <a:rPr lang="en-US" b="true" sz="2562">
+              <a:rPr lang="en-US" b="true" sz="3500">
                 <a:solidFill>
                   <a:srgbClr val="2E7D32"/>
                 </a:solidFill>
@@ -8255,11 +7885,11 @@
           <a:p>
             <a:pPr algn="l">
               <a:lnSpc>
-                <a:spcPts val="3075"/>
+                <a:spcPts val="4200"/>
               </a:lnSpc>
             </a:pPr>
             <a:r>
-              <a:rPr lang="en-US" b="true" sz="2562">
+              <a:rPr lang="en-US" b="true" sz="3500">
                 <a:solidFill>
                   <a:srgbClr val="2E7D32"/>
                 </a:solidFill>
@@ -8274,11 +7904,11 @@
           <a:p>
             <a:pPr algn="l">
               <a:lnSpc>
-                <a:spcPts val="3075"/>
+                <a:spcPts val="4200"/>
               </a:lnSpc>
             </a:pPr>
             <a:r>
-              <a:rPr lang="en-US" b="true" sz="2562">
+              <a:rPr lang="en-US" b="true" sz="3500">
                 <a:solidFill>
                   <a:srgbClr val="2E7D32"/>
                 </a:solidFill>
@@ -8293,11 +7923,11 @@
           <a:p>
             <a:pPr algn="l">
               <a:lnSpc>
-                <a:spcPts val="3075"/>
+                <a:spcPts val="4200"/>
               </a:lnSpc>
             </a:pPr>
             <a:r>
-              <a:rPr lang="en-US" b="true" sz="2562">
+              <a:rPr lang="en-US" b="true" sz="3500">
                 <a:solidFill>
                   <a:srgbClr val="2E7D32"/>
                 </a:solidFill>
@@ -8312,11 +7942,11 @@
           <a:p>
             <a:pPr algn="l">
               <a:lnSpc>
-                <a:spcPts val="3075"/>
+                <a:spcPts val="4200"/>
               </a:lnSpc>
             </a:pPr>
             <a:r>
-              <a:rPr lang="en-US" b="true" sz="2562">
+              <a:rPr lang="en-US" b="true" sz="3500">
                 <a:solidFill>
                   <a:srgbClr val="2E7D32"/>
                 </a:solidFill>
@@ -8331,11 +7961,11 @@
           <a:p>
             <a:pPr algn="l">
               <a:lnSpc>
-                <a:spcPts val="3075"/>
+                <a:spcPts val="4200"/>
               </a:lnSpc>
             </a:pPr>
             <a:r>
-              <a:rPr lang="en-US" b="true" sz="2562">
+              <a:rPr lang="en-US" b="true" sz="3500">
                 <a:solidFill>
                   <a:srgbClr val="2E7D32"/>
                 </a:solidFill>
@@ -8350,7 +7980,7 @@
           <a:p>
             <a:pPr algn="l">
               <a:lnSpc>
-                <a:spcPts val="3075"/>
+                <a:spcPts val="4200"/>
               </a:lnSpc>
             </a:pPr>
           </a:p>
@@ -8358,14 +7988,14 @@
       </p:sp>
       <p:sp>
         <p:nvSpPr>
-          <p:cNvPr name="TextBox 9" id="9"/>
+          <p:cNvPr name="TextBox 6" id="6"/>
           <p:cNvSpPr txBox="true"/>
           <p:nvPr/>
         </p:nvSpPr>
         <p:spPr>
           <a:xfrm rot="0">
             <a:off x="1143000" y="809625"/>
-            <a:ext cx="7205762" cy="695325"/>
+            <a:ext cx="8427740" cy="809625"/>
           </a:xfrm>
           <a:prstGeom prst="rect">
             <a:avLst/>
@@ -8379,11 +8009,11 @@
           <a:p>
             <a:pPr algn="l">
               <a:lnSpc>
-                <a:spcPts val="5130"/>
+                <a:spcPts val="6000"/>
               </a:lnSpc>
             </a:pPr>
             <a:r>
-              <a:rPr lang="en-US" b="true" sz="4275">
+              <a:rPr lang="en-US" b="true" sz="5000">
                 <a:solidFill>
                   <a:srgbClr val="1B5E20"/>
                 </a:solidFill>
@@ -8399,7 +8029,7 @@
       </p:sp>
       <p:grpSp>
         <p:nvGrpSpPr>
-          <p:cNvPr name="Group 10" id="10"/>
+          <p:cNvPr name="Group 7" id="7"/>
           <p:cNvGrpSpPr/>
           <p:nvPr/>
         </p:nvGrpSpPr>
@@ -8413,7 +8043,7 @@
         </p:grpSpPr>
         <p:sp>
           <p:nvSpPr>
-            <p:cNvPr name="Freeform 11" id="11"/>
+            <p:cNvPr name="Freeform 8" id="8"/>
             <p:cNvSpPr/>
             <p:nvPr/>
           </p:nvSpPr>
@@ -8454,14 +8084,14 @@
       </p:grpSp>
       <p:sp>
         <p:nvSpPr>
-          <p:cNvPr name="TextBox 12" id="12"/>
+          <p:cNvPr name="TextBox 9" id="9"/>
           <p:cNvSpPr txBox="true"/>
           <p:nvPr/>
         </p:nvSpPr>
         <p:spPr>
           <a:xfrm rot="0">
-            <a:off x="9930186" y="3946861"/>
-            <a:ext cx="8553094" cy="2290166"/>
+            <a:off x="9286777" y="3673439"/>
+            <a:ext cx="8773943" cy="2825115"/>
           </a:xfrm>
           <a:prstGeom prst="rect">
             <a:avLst/>
@@ -8475,14 +8105,14 @@
           <a:p>
             <a:pPr algn="l">
               <a:lnSpc>
-                <a:spcPts val="6258"/>
+                <a:spcPts val="7680"/>
               </a:lnSpc>
               <a:spcBef>
                 <a:spcPct val="0"/>
               </a:spcBef>
             </a:pPr>
             <a:r>
-              <a:rPr lang="en-US" sz="3259">
+              <a:rPr lang="en-US" sz="4000">
                 <a:solidFill>
                   <a:srgbClr val="000000"/>
                 </a:solidFill>
@@ -8497,14 +8127,14 @@
           <a:p>
             <a:pPr algn="l">
               <a:lnSpc>
-                <a:spcPts val="6258"/>
+                <a:spcPts val="7680"/>
               </a:lnSpc>
               <a:spcBef>
                 <a:spcPct val="0"/>
               </a:spcBef>
             </a:pPr>
             <a:r>
-              <a:rPr lang="en-US" sz="3259">
+              <a:rPr lang="en-US" sz="4000">
                 <a:solidFill>
                   <a:srgbClr val="000000"/>
                 </a:solidFill>
@@ -8519,14 +8149,14 @@
           <a:p>
             <a:pPr algn="l">
               <a:lnSpc>
-                <a:spcPts val="6258"/>
+                <a:spcPts val="7680"/>
               </a:lnSpc>
               <a:spcBef>
                 <a:spcPct val="0"/>
               </a:spcBef>
             </a:pPr>
             <a:r>
-              <a:rPr lang="en-US" sz="3259">
+              <a:rPr lang="en-US" sz="4000">
                 <a:solidFill>
                   <a:srgbClr val="000000"/>
                 </a:solidFill>
@@ -8568,77 +8198,62 @@
           <a:chExt cx="0" cy="0"/>
         </a:xfrm>
       </p:grpSpPr>
-      <p:grpSp>
-        <p:nvGrpSpPr>
-          <p:cNvPr name="Group 2" id="2"/>
-          <p:cNvGrpSpPr/>
+      <p:sp>
+        <p:nvSpPr>
+          <p:cNvPr name="Freeform 2" id="2"/>
+          <p:cNvSpPr/>
           <p:nvPr/>
-        </p:nvGrpSpPr>
-        <p:grpSpPr>
-          <a:xfrm rot="0">
-            <a:off x="-42748" y="0"/>
+        </p:nvSpPr>
+        <p:spPr>
+          <a:xfrm flipH="false" flipV="false" rot="0">
+            <a:off x="0" y="0"/>
             <a:ext cx="18288000" cy="10287000"/>
-            <a:chOff x="0" y="0"/>
-            <a:chExt cx="24384000" cy="13716000"/>
-          </a:xfrm>
-        </p:grpSpPr>
-        <p:sp>
-          <p:nvSpPr>
-            <p:cNvPr name="Freeform 3" id="3" descr="image.png"/>
-            <p:cNvSpPr/>
-            <p:nvPr/>
-          </p:nvSpPr>
-          <p:spPr>
-            <a:xfrm flipH="false" flipV="false" rot="0">
-              <a:off x="0" y="0"/>
-              <a:ext cx="24384000" cy="13716000"/>
-            </a:xfrm>
-            <a:custGeom>
-              <a:avLst/>
-              <a:gdLst/>
-              <a:ahLst/>
-              <a:cxnLst/>
-              <a:rect r="r" b="b" t="t" l="l"/>
-              <a:pathLst>
-                <a:path h="13716000" w="24384000">
-                  <a:moveTo>
-                    <a:pt x="0" y="0"/>
-                  </a:moveTo>
-                  <a:lnTo>
-                    <a:pt x="24384000" y="0"/>
-                  </a:lnTo>
-                  <a:lnTo>
-                    <a:pt x="24384000" y="13716000"/>
-                  </a:lnTo>
-                  <a:lnTo>
-                    <a:pt x="0" y="13716000"/>
-                  </a:lnTo>
-                  <a:lnTo>
-                    <a:pt x="0" y="0"/>
-                  </a:lnTo>
-                  <a:close/>
-                </a:path>
-              </a:pathLst>
-            </a:custGeom>
-            <a:blipFill>
-              <a:blip r:embed="rId3"/>
-              <a:stretch>
-                <a:fillRect l="0" t="0" r="0" b="0"/>
-              </a:stretch>
-            </a:blipFill>
-          </p:spPr>
-        </p:sp>
-      </p:grpSp>
-      <p:sp>
-        <p:nvSpPr>
-          <p:cNvPr name="TextBox 4" id="4"/>
+          </a:xfrm>
+          <a:custGeom>
+            <a:avLst/>
+            <a:gdLst/>
+            <a:ahLst/>
+            <a:cxnLst/>
+            <a:rect r="r" b="b" t="t" l="l"/>
+            <a:pathLst>
+              <a:path h="10287000" w="18288000">
+                <a:moveTo>
+                  <a:pt x="0" y="0"/>
+                </a:moveTo>
+                <a:lnTo>
+                  <a:pt x="18288000" y="0"/>
+                </a:lnTo>
+                <a:lnTo>
+                  <a:pt x="18288000" y="10287000"/>
+                </a:lnTo>
+                <a:lnTo>
+                  <a:pt x="0" y="10287000"/>
+                </a:lnTo>
+                <a:lnTo>
+                  <a:pt x="0" y="0"/>
+                </a:lnTo>
+                <a:close/>
+              </a:path>
+            </a:pathLst>
+          </a:custGeom>
+          <a:blipFill>
+            <a:blip r:embed="rId3"/>
+            <a:stretch>
+              <a:fillRect l="0" t="-9222" r="0" b="-9222"/>
+            </a:stretch>
+          </a:blipFill>
+        </p:spPr>
+      </p:sp>
+      <p:sp>
+        <p:nvSpPr>
+          <p:cNvPr name="TextBox 3" id="3"/>
           <p:cNvSpPr txBox="true"/>
           <p:nvPr/>
         </p:nvSpPr>
         <p:spPr>
           <a:xfrm rot="0">
-            <a:off x="914400" y="2312194"/>
-            <a:ext cx="7943850" cy="3110173"/>
+            <a:off x="729772" y="2621280"/>
+            <a:ext cx="8785774" cy="4768215"/>
           </a:xfrm>
           <a:prstGeom prst="rect">
             <a:avLst/>
@@ -8652,11 +8267,11 @@
           <a:p>
             <a:pPr algn="l">
               <a:lnSpc>
-                <a:spcPts val="6311"/>
+                <a:spcPts val="7680"/>
               </a:lnSpc>
             </a:pPr>
             <a:r>
-              <a:rPr lang="en-US" sz="3286">
+              <a:rPr lang="en-US" sz="4000">
                 <a:solidFill>
                   <a:srgbClr val="334155"/>
                 </a:solidFill>
@@ -8668,7 +8283,7 @@
               <a:t>Usin</a:t>
             </a:r>
             <a:r>
-              <a:rPr lang="en-US" sz="3286">
+              <a:rPr lang="en-US" sz="4000">
                 <a:solidFill>
                   <a:srgbClr val="334155"/>
                 </a:solidFill>
@@ -8683,11 +8298,11 @@
           <a:p>
             <a:pPr algn="l">
               <a:lnSpc>
-                <a:spcPts val="6311"/>
+                <a:spcPts val="7680"/>
               </a:lnSpc>
             </a:pPr>
             <a:r>
-              <a:rPr lang="en-US" sz="3286">
+              <a:rPr lang="en-US" sz="4000">
                 <a:solidFill>
                   <a:srgbClr val="334155"/>
                 </a:solidFill>
@@ -8702,11 +8317,11 @@
           <a:p>
             <a:pPr algn="l">
               <a:lnSpc>
-                <a:spcPts val="6311"/>
+                <a:spcPts val="7680"/>
               </a:lnSpc>
             </a:pPr>
             <a:r>
-              <a:rPr lang="en-US" sz="3286">
+              <a:rPr lang="en-US" sz="4000">
                 <a:solidFill>
                   <a:srgbClr val="334155"/>
                 </a:solidFill>
@@ -8721,7 +8336,7 @@
           <a:p>
             <a:pPr algn="l">
               <a:lnSpc>
-                <a:spcPts val="6311"/>
+                <a:spcPts val="7680"/>
               </a:lnSpc>
             </a:pPr>
           </a:p>
@@ -8729,14 +8344,14 @@
       </p:sp>
       <p:sp>
         <p:nvSpPr>
-          <p:cNvPr name="TextBox 5" id="5"/>
+          <p:cNvPr name="TextBox 4" id="4"/>
           <p:cNvSpPr txBox="true"/>
           <p:nvPr/>
         </p:nvSpPr>
         <p:spPr>
           <a:xfrm rot="0">
             <a:off x="1143000" y="809625"/>
-            <a:ext cx="17102252" cy="705526"/>
+            <a:ext cx="7155855" cy="809625"/>
           </a:xfrm>
           <a:prstGeom prst="rect">
             <a:avLst/>
@@ -8750,11 +8365,11 @@
           <a:p>
             <a:pPr algn="l">
               <a:lnSpc>
-                <a:spcPts val="5130"/>
+                <a:spcPts val="6000"/>
               </a:lnSpc>
             </a:pPr>
             <a:r>
-              <a:rPr lang="en-US" b="true" sz="4275">
+              <a:rPr lang="en-US" b="true" sz="5000">
                 <a:solidFill>
                   <a:srgbClr val="1B5E20"/>
                 </a:solidFill>
@@ -8764,426 +8379,6 @@
                 <a:sym typeface="Poppins Bold"/>
               </a:rPr>
               <a:t>Core DOM Knowledge </a:t>
-            </a:r>
-          </a:p>
-        </p:txBody>
-      </p:sp>
-      <p:grpSp>
-        <p:nvGrpSpPr>
-          <p:cNvPr name="Group 6" id="6"/>
-          <p:cNvGrpSpPr/>
-          <p:nvPr/>
-        </p:nvGrpSpPr>
-        <p:grpSpPr>
-          <a:xfrm rot="0">
-            <a:off x="857250" y="857250"/>
-            <a:ext cx="114300" cy="814388"/>
-            <a:chOff x="0" y="0"/>
-            <a:chExt cx="152400" cy="1085850"/>
-          </a:xfrm>
-        </p:grpSpPr>
-        <p:sp>
-          <p:nvSpPr>
-            <p:cNvPr name="Freeform 7" id="7"/>
-            <p:cNvSpPr/>
-            <p:nvPr/>
-          </p:nvSpPr>
-          <p:spPr>
-            <a:xfrm flipH="false" flipV="false" rot="0">
-              <a:off x="0" y="0"/>
-              <a:ext cx="152400" cy="1085850"/>
-            </a:xfrm>
-            <a:custGeom>
-              <a:avLst/>
-              <a:gdLst/>
-              <a:ahLst/>
-              <a:cxnLst/>
-              <a:rect r="r" b="b" t="t" l="l"/>
-              <a:pathLst>
-                <a:path h="1085850" w="152400">
-                  <a:moveTo>
-                    <a:pt x="0" y="0"/>
-                  </a:moveTo>
-                  <a:lnTo>
-                    <a:pt x="152400" y="0"/>
-                  </a:lnTo>
-                  <a:lnTo>
-                    <a:pt x="152400" y="1085850"/>
-                  </a:lnTo>
-                  <a:lnTo>
-                    <a:pt x="0" y="1085850"/>
-                  </a:lnTo>
-                  <a:close/>
-                </a:path>
-              </a:pathLst>
-            </a:custGeom>
-            <a:solidFill>
-              <a:srgbClr val="8BC34A"/>
-            </a:solidFill>
-          </p:spPr>
-        </p:sp>
-      </p:grpSp>
-      <p:grpSp>
-        <p:nvGrpSpPr>
-          <p:cNvPr name="Group 8" id="8"/>
-          <p:cNvGrpSpPr/>
-          <p:nvPr/>
-        </p:nvGrpSpPr>
-        <p:grpSpPr>
-          <a:xfrm rot="0">
-            <a:off x="9525071" y="2550319"/>
-            <a:ext cx="8001000" cy="5186362"/>
-            <a:chOff x="0" y="0"/>
-            <a:chExt cx="10668000" cy="6915150"/>
-          </a:xfrm>
-        </p:grpSpPr>
-        <p:sp>
-          <p:nvSpPr>
-            <p:cNvPr name="Freeform 9" id="9" descr="image.png"/>
-            <p:cNvSpPr/>
-            <p:nvPr/>
-          </p:nvSpPr>
-          <p:spPr>
-            <a:xfrm flipH="false" flipV="false" rot="0">
-              <a:off x="0" y="0"/>
-              <a:ext cx="10668000" cy="6915150"/>
-            </a:xfrm>
-            <a:custGeom>
-              <a:avLst/>
-              <a:gdLst/>
-              <a:ahLst/>
-              <a:cxnLst/>
-              <a:rect r="r" b="b" t="t" l="l"/>
-              <a:pathLst>
-                <a:path h="6915150" w="10668000">
-                  <a:moveTo>
-                    <a:pt x="0" y="0"/>
-                  </a:moveTo>
-                  <a:lnTo>
-                    <a:pt x="10668000" y="0"/>
-                  </a:lnTo>
-                  <a:lnTo>
-                    <a:pt x="10668000" y="6915150"/>
-                  </a:lnTo>
-                  <a:lnTo>
-                    <a:pt x="0" y="6915150"/>
-                  </a:lnTo>
-                  <a:lnTo>
-                    <a:pt x="0" y="0"/>
-                  </a:lnTo>
-                  <a:close/>
-                </a:path>
-              </a:pathLst>
-            </a:custGeom>
-            <a:blipFill>
-              <a:blip r:embed="rId4"/>
-              <a:stretch>
-                <a:fillRect l="0" t="0" r="0" b="0"/>
-              </a:stretch>
-            </a:blipFill>
-          </p:spPr>
-        </p:sp>
-      </p:grpSp>
-      <p:sp>
-        <p:nvSpPr>
-          <p:cNvPr name="TextBox 10" id="10"/>
-          <p:cNvSpPr txBox="true"/>
-          <p:nvPr/>
-        </p:nvSpPr>
-        <p:spPr>
-          <a:xfrm rot="0">
-            <a:off x="9694126" y="2571009"/>
-            <a:ext cx="7831945" cy="5165672"/>
-          </a:xfrm>
-          <a:prstGeom prst="rect">
-            <a:avLst/>
-          </a:prstGeom>
-        </p:spPr>
-        <p:txBody>
-          <a:bodyPr anchor="t" rtlCol="false" tIns="0" lIns="0" bIns="0" rIns="0">
-            <a:spAutoFit/>
-          </a:bodyPr>
-          <a:lstStyle/>
-          <a:p>
-            <a:pPr algn="l">
-              <a:lnSpc>
-                <a:spcPts val="4069"/>
-              </a:lnSpc>
-            </a:pPr>
-            <a:r>
-              <a:rPr lang="en-US" sz="3391" b="true">
-                <a:solidFill>
-                  <a:srgbClr val="2E7D32"/>
-                </a:solidFill>
-                <a:latin typeface="Poppins Bold"/>
-                <a:ea typeface="Poppins Bold"/>
-                <a:cs typeface="Poppins Bold"/>
-                <a:sym typeface="Poppins Bold"/>
-              </a:rPr>
-              <a:t>const item = </a:t>
-            </a:r>
-          </a:p>
-          <a:p>
-            <a:pPr algn="l">
-              <a:lnSpc>
-                <a:spcPts val="4069"/>
-              </a:lnSpc>
-            </a:pPr>
-            <a:r>
-              <a:rPr lang="en-US" b="true" sz="3391">
-                <a:solidFill>
-                  <a:srgbClr val="2E7D32"/>
-                </a:solidFill>
-                <a:latin typeface="Poppins Bold"/>
-                <a:ea typeface="Poppins Bold"/>
-                <a:cs typeface="Poppins Bold"/>
-                <a:sym typeface="Poppins Bold"/>
-              </a:rPr>
-              <a:t>        </a:t>
-            </a:r>
-            <a:r>
-              <a:rPr lang="en-US" b="true" sz="3391">
-                <a:solidFill>
-                  <a:srgbClr val="2E7D32"/>
-                </a:solidFill>
-                <a:latin typeface="Poppins Bold"/>
-                <a:ea typeface="Poppins Bold"/>
-                <a:cs typeface="Poppins Bold"/>
-                <a:sym typeface="Poppins Bold"/>
-              </a:rPr>
-              <a:t>document.createElement("div"); </a:t>
-            </a:r>
-          </a:p>
-          <a:p>
-            <a:pPr algn="l">
-              <a:lnSpc>
-                <a:spcPts val="4069"/>
-              </a:lnSpc>
-            </a:pPr>
-            <a:r>
-              <a:rPr lang="en-US" b="true" sz="3391">
-                <a:solidFill>
-                  <a:srgbClr val="2E7D32"/>
-                </a:solidFill>
-                <a:latin typeface="Poppins Bold"/>
-                <a:ea typeface="Poppins Bold"/>
-                <a:cs typeface="Poppins Bold"/>
-                <a:sym typeface="Poppins Bold"/>
-              </a:rPr>
-              <a:t>   item.className = "col mb-3"; </a:t>
-            </a:r>
-          </a:p>
-          <a:p>
-            <a:pPr algn="l">
-              <a:lnSpc>
-                <a:spcPts val="4069"/>
-              </a:lnSpc>
-            </a:pPr>
-          </a:p>
-          <a:p>
-            <a:pPr algn="l">
-              <a:lnSpc>
-                <a:spcPts val="4069"/>
-              </a:lnSpc>
-            </a:pPr>
-            <a:r>
-              <a:rPr lang="en-US" b="true" sz="3391">
-                <a:solidFill>
-                  <a:srgbClr val="2E7D32"/>
-                </a:solidFill>
-                <a:latin typeface="Poppins Bold"/>
-                <a:ea typeface="Poppins Bold"/>
-                <a:cs typeface="Poppins Bold"/>
-                <a:sym typeface="Poppins Bold"/>
-              </a:rPr>
-              <a:t>      const title = </a:t>
-            </a:r>
-          </a:p>
-          <a:p>
-            <a:pPr algn="l">
-              <a:lnSpc>
-                <a:spcPts val="4069"/>
-              </a:lnSpc>
-            </a:pPr>
-            <a:r>
-              <a:rPr lang="en-US" b="true" sz="3391">
-                <a:solidFill>
-                  <a:srgbClr val="2E7D32"/>
-                </a:solidFill>
-                <a:latin typeface="Poppins Bold"/>
-                <a:ea typeface="Poppins Bold"/>
-                <a:cs typeface="Poppins Bold"/>
-                <a:sym typeface="Poppins Bold"/>
-              </a:rPr>
-              <a:t>            document.createElement("h6"); </a:t>
-            </a:r>
-          </a:p>
-          <a:p>
-            <a:pPr algn="l">
-              <a:lnSpc>
-                <a:spcPts val="4069"/>
-              </a:lnSpc>
-            </a:pPr>
-            <a:r>
-              <a:rPr lang="en-US" b="true" sz="3391">
-                <a:solidFill>
-                  <a:srgbClr val="2E7D32"/>
-                </a:solidFill>
-                <a:latin typeface="Poppins Bold"/>
-                <a:ea typeface="Poppins Bold"/>
-                <a:cs typeface="Poppins Bold"/>
-                <a:sym typeface="Poppins Bold"/>
-              </a:rPr>
-              <a:t>  title.textContent = name;</a:t>
-            </a:r>
-          </a:p>
-          <a:p>
-            <a:pPr algn="l">
-              <a:lnSpc>
-                <a:spcPts val="4069"/>
-              </a:lnSpc>
-            </a:pPr>
-          </a:p>
-        </p:txBody>
-      </p:sp>
-    </p:spTree>
-  </p:cSld>
-  <p:clrMapOvr>
-    <a:masterClrMapping/>
-  </p:clrMapOvr>
-  <p:transition spd="fast">
-    <p:fade/>
-  </p:transition>
-</p:sld>
-</file>
-
-<file path=ppt/slides/slide6.xml><?xml version="1.0" encoding="utf-8"?>
-<p:sld xmlns:p="http://schemas.openxmlformats.org/presentationml/2006/main" xmlns:a="http://schemas.openxmlformats.org/drawingml/2006/main" xmlns:r="http://schemas.openxmlformats.org/officeDocument/2006/relationships">
-  <p:cSld>
-    <p:spTree>
-      <p:nvGrpSpPr>
-        <p:cNvPr id="1" name=""/>
-        <p:cNvGrpSpPr/>
-        <p:nvPr/>
-      </p:nvGrpSpPr>
-      <p:grpSpPr>
-        <a:xfrm>
-          <a:off x="0" y="0"/>
-          <a:ext cx="0" cy="0"/>
-          <a:chOff x="0" y="0"/>
-          <a:chExt cx="0" cy="0"/>
-        </a:xfrm>
-      </p:grpSpPr>
-      <p:grpSp>
-        <p:nvGrpSpPr>
-          <p:cNvPr name="Group 2" id="2"/>
-          <p:cNvGrpSpPr/>
-          <p:nvPr/>
-        </p:nvGrpSpPr>
-        <p:grpSpPr>
-          <a:xfrm rot="0">
-            <a:off x="66970" y="0"/>
-            <a:ext cx="18288000" cy="10287000"/>
-            <a:chOff x="0" y="0"/>
-            <a:chExt cx="24384000" cy="13716000"/>
-          </a:xfrm>
-        </p:grpSpPr>
-        <p:sp>
-          <p:nvSpPr>
-            <p:cNvPr name="Freeform 3" id="3" descr="image.png"/>
-            <p:cNvSpPr/>
-            <p:nvPr/>
-          </p:nvSpPr>
-          <p:spPr>
-            <a:xfrm flipH="false" flipV="false" rot="0">
-              <a:off x="0" y="0"/>
-              <a:ext cx="24384000" cy="13716000"/>
-            </a:xfrm>
-            <a:custGeom>
-              <a:avLst/>
-              <a:gdLst/>
-              <a:ahLst/>
-              <a:cxnLst/>
-              <a:rect r="r" b="b" t="t" l="l"/>
-              <a:pathLst>
-                <a:path h="13716000" w="24384000">
-                  <a:moveTo>
-                    <a:pt x="0" y="0"/>
-                  </a:moveTo>
-                  <a:lnTo>
-                    <a:pt x="24384000" y="0"/>
-                  </a:lnTo>
-                  <a:lnTo>
-                    <a:pt x="24384000" y="13716000"/>
-                  </a:lnTo>
-                  <a:lnTo>
-                    <a:pt x="0" y="13716000"/>
-                  </a:lnTo>
-                  <a:lnTo>
-                    <a:pt x="0" y="0"/>
-                  </a:lnTo>
-                  <a:close/>
-                </a:path>
-              </a:pathLst>
-            </a:custGeom>
-            <a:blipFill>
-              <a:blip r:embed="rId3"/>
-              <a:stretch>
-                <a:fillRect l="0" t="0" r="0" b="0"/>
-              </a:stretch>
-            </a:blipFill>
-          </p:spPr>
-        </p:sp>
-      </p:grpSp>
-      <p:sp>
-        <p:nvSpPr>
-          <p:cNvPr name="TextBox 4" id="4"/>
-          <p:cNvSpPr txBox="true"/>
-          <p:nvPr/>
-        </p:nvSpPr>
-        <p:spPr>
-          <a:xfrm rot="0">
-            <a:off x="1143000" y="809625"/>
-            <a:ext cx="5559623" cy="695325"/>
-          </a:xfrm>
-          <a:prstGeom prst="rect">
-            <a:avLst/>
-          </a:prstGeom>
-        </p:spPr>
-        <p:txBody>
-          <a:bodyPr anchor="t" rtlCol="false" tIns="0" lIns="0" bIns="0" rIns="0">
-            <a:spAutoFit/>
-          </a:bodyPr>
-          <a:lstStyle/>
-          <a:p>
-            <a:pPr algn="l">
-              <a:lnSpc>
-                <a:spcPts val="5130"/>
-              </a:lnSpc>
-            </a:pPr>
-            <a:r>
-              <a:rPr lang="en-US" b="true" sz="4275">
-                <a:solidFill>
-                  <a:srgbClr val="1B5E20"/>
-                </a:solidFill>
-                <a:latin typeface="Poppins Bold"/>
-                <a:ea typeface="Poppins Bold"/>
-                <a:cs typeface="Poppins Bold"/>
-                <a:sym typeface="Poppins Bold"/>
-              </a:rPr>
-              <a:t>DOM</a:t>
-            </a:r>
-            <a:r>
-              <a:rPr lang="en-US" b="true" sz="4275">
-                <a:solidFill>
-                  <a:srgbClr val="1B5E20"/>
-                </a:solidFill>
-                <a:latin typeface="Poppins Bold"/>
-                <a:ea typeface="Poppins Bold"/>
-                <a:cs typeface="Poppins Bold"/>
-                <a:sym typeface="Poppins Bold"/>
-              </a:rPr>
-              <a:t> Tree Assembly</a:t>
             </a:r>
           </a:p>
         </p:txBody>
@@ -9251,10 +8446,10 @@
         </p:nvGrpSpPr>
         <p:grpSpPr>
           <a:xfrm rot="0">
-            <a:off x="717451" y="2812059"/>
-            <a:ext cx="9056758" cy="5870720"/>
+            <a:off x="9144000" y="2489260"/>
+            <a:ext cx="8382071" cy="5419961"/>
             <a:chOff x="0" y="0"/>
-            <a:chExt cx="10668000" cy="6915150"/>
+            <a:chExt cx="10918995" cy="7060370"/>
           </a:xfrm>
         </p:grpSpPr>
         <p:sp>
@@ -9266,7 +8461,7 @@
           <p:spPr>
             <a:xfrm flipH="false" flipV="false" rot="0">
               <a:off x="0" y="0"/>
-              <a:ext cx="10668000" cy="6915150"/>
+              <a:ext cx="10918996" cy="7060370"/>
             </a:xfrm>
             <a:custGeom>
               <a:avLst/>
@@ -9275,18 +8470,18 @@
               <a:cxnLst/>
               <a:rect r="r" b="b" t="t" l="l"/>
               <a:pathLst>
-                <a:path h="6915150" w="10668000">
+                <a:path h="7060370" w="10918996">
                   <a:moveTo>
                     <a:pt x="0" y="0"/>
                   </a:moveTo>
                   <a:lnTo>
-                    <a:pt x="10668000" y="0"/>
+                    <a:pt x="10918996" y="0"/>
                   </a:lnTo>
                   <a:lnTo>
-                    <a:pt x="10668000" y="6915150"/>
+                    <a:pt x="10918996" y="7060370"/>
                   </a:lnTo>
                   <a:lnTo>
-                    <a:pt x="0" y="6915150"/>
+                    <a:pt x="0" y="7060370"/>
                   </a:lnTo>
                   <a:lnTo>
                     <a:pt x="0" y="0"/>
@@ -9298,7 +8493,7 @@
             <a:blipFill>
               <a:blip r:embed="rId4"/>
               <a:stretch>
-                <a:fillRect l="0" t="0" r="0" b="0"/>
+                <a:fillRect l="0" t="-123" r="0" b="-123"/>
               </a:stretch>
             </a:blipFill>
           </p:spPr>
@@ -9312,8 +8507,8 @@
         </p:nvSpPr>
         <p:spPr>
           <a:xfrm rot="0">
-            <a:off x="857250" y="3209925"/>
-            <a:ext cx="8758992" cy="4416793"/>
+            <a:off x="9181107" y="2705100"/>
+            <a:ext cx="8344964" cy="4838700"/>
           </a:xfrm>
           <a:prstGeom prst="rect">
             <a:avLst/>
@@ -9327,11 +8522,11 @@
           <a:p>
             <a:pPr algn="l">
               <a:lnSpc>
-                <a:spcPts val="3869"/>
+                <a:spcPts val="4200"/>
               </a:lnSpc>
             </a:pPr>
             <a:r>
-              <a:rPr lang="en-US" b="true" sz="3224">
+              <a:rPr lang="en-US" sz="3500" b="true">
                 <a:solidFill>
                   <a:srgbClr val="2E7D32"/>
                 </a:solidFill>
@@ -9340,10 +8535,17 @@
                 <a:cs typeface="Poppins Bold"/>
                 <a:sym typeface="Poppins Bold"/>
               </a:rPr>
-              <a:t>ca</a:t>
-            </a:r>
-            <a:r>
-              <a:rPr lang="en-US" b="true" sz="3224">
+              <a:t>const item = </a:t>
+            </a:r>
+          </a:p>
+          <a:p>
+            <a:pPr algn="l">
+              <a:lnSpc>
+                <a:spcPts val="4200"/>
+              </a:lnSpc>
+            </a:pPr>
+            <a:r>
+              <a:rPr lang="en-US" b="true" sz="3500">
                 <a:solidFill>
                   <a:srgbClr val="2E7D32"/>
                 </a:solidFill>
@@ -9352,17 +8554,10 @@
                 <a:cs typeface="Poppins Bold"/>
                 <a:sym typeface="Poppins Bold"/>
               </a:rPr>
-              <a:t>rdBody.appendChild(title);</a:t>
-            </a:r>
-          </a:p>
-          <a:p>
-            <a:pPr algn="l">
-              <a:lnSpc>
-                <a:spcPts val="3869"/>
-              </a:lnSpc>
-            </a:pPr>
-            <a:r>
-              <a:rPr lang="en-US" b="true" sz="3224">
+              <a:t>        </a:t>
+            </a:r>
+            <a:r>
+              <a:rPr lang="en-US" b="true" sz="3500">
                 <a:solidFill>
                   <a:srgbClr val="2E7D32"/>
                 </a:solidFill>
@@ -9371,17 +8566,17 @@
                 <a:cs typeface="Poppins Bold"/>
                 <a:sym typeface="Poppins Bold"/>
               </a:rPr>
-              <a:t>cardBody.appendChild(priceText); </a:t>
+              <a:t>document.createElement("div"); </a:t>
             </a:r>
           </a:p>
           <a:p>
             <a:pPr algn="l">
               <a:lnSpc>
-                <a:spcPts val="3869"/>
+                <a:spcPts val="4200"/>
               </a:lnSpc>
             </a:pPr>
             <a:r>
-              <a:rPr lang="en-US" b="true" sz="3224">
+              <a:rPr lang="en-US" b="true" sz="3500">
                 <a:solidFill>
                   <a:srgbClr val="2E7D32"/>
                 </a:solidFill>
@@ -9390,17 +8585,24 @@
                 <a:cs typeface="Poppins Bold"/>
                 <a:sym typeface="Poppins Bold"/>
               </a:rPr>
-              <a:t>card.appendChild(cardBody); </a:t>
+              <a:t>   item.className = "col mb-3"; </a:t>
             </a:r>
           </a:p>
           <a:p>
             <a:pPr algn="l">
               <a:lnSpc>
-                <a:spcPts val="3869"/>
+                <a:spcPts val="4200"/>
               </a:lnSpc>
             </a:pPr>
-            <a:r>
-              <a:rPr lang="en-US" b="true" sz="3224">
+          </a:p>
+          <a:p>
+            <a:pPr algn="l">
+              <a:lnSpc>
+                <a:spcPts val="4200"/>
+              </a:lnSpc>
+            </a:pPr>
+            <a:r>
+              <a:rPr lang="en-US" b="true" sz="3500">
                 <a:solidFill>
                   <a:srgbClr val="2E7D32"/>
                 </a:solidFill>
@@ -9409,24 +8611,17 @@
                 <a:cs typeface="Poppins Bold"/>
                 <a:sym typeface="Poppins Bold"/>
               </a:rPr>
-              <a:t>productItem.appendChild(card);</a:t>
+              <a:t>      const title = </a:t>
             </a:r>
           </a:p>
           <a:p>
             <a:pPr algn="l">
               <a:lnSpc>
-                <a:spcPts val="3869"/>
+                <a:spcPts val="4200"/>
               </a:lnSpc>
             </a:pPr>
-          </a:p>
-          <a:p>
-            <a:pPr algn="l">
-              <a:lnSpc>
-                <a:spcPts val="3869"/>
-              </a:lnSpc>
-            </a:pPr>
-            <a:r>
-              <a:rPr lang="en-US" b="true" sz="3224">
+            <a:r>
+              <a:rPr lang="en-US" b="true" sz="3500">
                 <a:solidFill>
                   <a:srgbClr val="2E7D32"/>
                 </a:solidFill>
@@ -9435,17 +8630,17 @@
                 <a:cs typeface="Poppins Bold"/>
                 <a:sym typeface="Poppins Bold"/>
               </a:rPr>
-              <a:t>document.getElementById("product?</a:t>
+              <a:t>            document.createElement("h6"); </a:t>
             </a:r>
           </a:p>
           <a:p>
             <a:pPr algn="l">
               <a:lnSpc>
-                <a:spcPts val="3869"/>
+                <a:spcPts val="4200"/>
               </a:lnSpc>
             </a:pPr>
             <a:r>
-              <a:rPr lang="en-US" b="true" sz="3224">
+              <a:rPr lang="en-US" b="true" sz="3500">
                 <a:solidFill>
                   <a:srgbClr val="2E7D32"/>
                 </a:solidFill>
@@ -9454,130 +8649,13 @@
                 <a:cs typeface="Poppins Bold"/>
                 <a:sym typeface="Poppins Bold"/>
               </a:rPr>
-              <a:t>list") </a:t>
+              <a:t>  title.textContent = name;</a:t>
             </a:r>
           </a:p>
           <a:p>
             <a:pPr algn="l">
               <a:lnSpc>
-                <a:spcPts val="3869"/>
-              </a:lnSpc>
-            </a:pPr>
-            <a:r>
-              <a:rPr lang="en-US" b="true" sz="3224">
-                <a:solidFill>
-                  <a:srgbClr val="2E7D32"/>
-                </a:solidFill>
-                <a:latin typeface="Poppins Bold"/>
-                <a:ea typeface="Poppins Bold"/>
-                <a:cs typeface="Poppins Bold"/>
-                <a:sym typeface="Poppins Bold"/>
-              </a:rPr>
-              <a:t> .appendChild(productItem);</a:t>
-            </a:r>
-          </a:p>
-          <a:p>
-            <a:pPr algn="l">
-              <a:lnSpc>
-                <a:spcPts val="3869"/>
-              </a:lnSpc>
-            </a:pPr>
-          </a:p>
-        </p:txBody>
-      </p:sp>
-      <p:sp>
-        <p:nvSpPr>
-          <p:cNvPr name="TextBox 10" id="10"/>
-          <p:cNvSpPr txBox="true"/>
-          <p:nvPr/>
-        </p:nvSpPr>
-        <p:spPr>
-          <a:xfrm rot="0">
-            <a:off x="9774209" y="2836067"/>
-            <a:ext cx="7485091" cy="3110173"/>
-          </a:xfrm>
-          <a:prstGeom prst="rect">
-            <a:avLst/>
-          </a:prstGeom>
-        </p:spPr>
-        <p:txBody>
-          <a:bodyPr anchor="t" rtlCol="false" tIns="0" lIns="0" bIns="0" rIns="0">
-            <a:spAutoFit/>
-          </a:bodyPr>
-          <a:lstStyle/>
-          <a:p>
-            <a:pPr algn="l">
-              <a:lnSpc>
-                <a:spcPts val="6311"/>
-              </a:lnSpc>
-            </a:pPr>
-            <a:r>
-              <a:rPr lang="en-US" sz="3286">
-                <a:solidFill>
-                  <a:srgbClr val="334155"/>
-                </a:solidFill>
-                <a:latin typeface="Lato"/>
-                <a:ea typeface="Lato"/>
-                <a:cs typeface="Lato"/>
-                <a:sym typeface="Lato"/>
-              </a:rPr>
-              <a:t>Const</a:t>
-            </a:r>
-            <a:r>
-              <a:rPr lang="en-US" sz="3286">
-                <a:solidFill>
-                  <a:srgbClr val="334155"/>
-                </a:solidFill>
-                <a:latin typeface="Lato"/>
-                <a:ea typeface="Lato"/>
-                <a:cs typeface="Lato"/>
-                <a:sym typeface="Lato"/>
-              </a:rPr>
-              <a:t>ructs nodes safely in browser local </a:t>
-            </a:r>
-          </a:p>
-          <a:p>
-            <a:pPr algn="l">
-              <a:lnSpc>
-                <a:spcPts val="6311"/>
-              </a:lnSpc>
-            </a:pPr>
-            <a:r>
-              <a:rPr lang="en-US" sz="3286">
-                <a:solidFill>
-                  <a:srgbClr val="334155"/>
-                </a:solidFill>
-                <a:latin typeface="Lato"/>
-                <a:ea typeface="Lato"/>
-                <a:cs typeface="Lato"/>
-                <a:sym typeface="Lato"/>
-              </a:rPr>
-              <a:t>memory before pushing them live to the </a:t>
-            </a:r>
-          </a:p>
-          <a:p>
-            <a:pPr algn="l">
-              <a:lnSpc>
-                <a:spcPts val="6311"/>
-              </a:lnSpc>
-            </a:pPr>
-            <a:r>
-              <a:rPr lang="en-US" sz="3286">
-                <a:solidFill>
-                  <a:srgbClr val="334155"/>
-                </a:solidFill>
-                <a:latin typeface="Lato"/>
-                <a:ea typeface="Lato"/>
-                <a:cs typeface="Lato"/>
-                <a:sym typeface="Lato"/>
-              </a:rPr>
-              <a:t>dynamic container.</a:t>
-            </a:r>
-          </a:p>
-          <a:p>
-            <a:pPr algn="l">
-              <a:lnSpc>
-                <a:spcPts val="6311"/>
+                <a:spcPts val="4200"/>
               </a:lnSpc>
             </a:pPr>
           </a:p>
@@ -9594,7 +8672,7 @@
 </p:sld>
 </file>
 
-<file path=ppt/slides/slide7.xml><?xml version="1.0" encoding="utf-8"?>
+<file path=ppt/slides/slide6.xml><?xml version="1.0" encoding="utf-8"?>
 <p:sld xmlns:p="http://schemas.openxmlformats.org/presentationml/2006/main" xmlns:a="http://schemas.openxmlformats.org/drawingml/2006/main" xmlns:r="http://schemas.openxmlformats.org/officeDocument/2006/relationships">
   <p:cSld>
     <p:spTree>
@@ -9611,77 +8689,62 @@
           <a:chExt cx="0" cy="0"/>
         </a:xfrm>
       </p:grpSpPr>
-      <p:grpSp>
-        <p:nvGrpSpPr>
-          <p:cNvPr name="Group 2" id="2"/>
-          <p:cNvGrpSpPr/>
+      <p:sp>
+        <p:nvSpPr>
+          <p:cNvPr name="Freeform 2" id="2"/>
+          <p:cNvSpPr/>
           <p:nvPr/>
-        </p:nvGrpSpPr>
-        <p:grpSpPr>
-          <a:xfrm rot="0">
+        </p:nvSpPr>
+        <p:spPr>
+          <a:xfrm flipH="false" flipV="false" rot="0">
             <a:off x="0" y="0"/>
             <a:ext cx="18288000" cy="10287000"/>
-            <a:chOff x="0" y="0"/>
-            <a:chExt cx="24384000" cy="13716000"/>
-          </a:xfrm>
-        </p:grpSpPr>
-        <p:sp>
-          <p:nvSpPr>
-            <p:cNvPr name="Freeform 3" id="3" descr="image.png"/>
-            <p:cNvSpPr/>
-            <p:nvPr/>
-          </p:nvSpPr>
-          <p:spPr>
-            <a:xfrm flipH="false" flipV="false" rot="0">
-              <a:off x="0" y="0"/>
-              <a:ext cx="24384000" cy="13716000"/>
-            </a:xfrm>
-            <a:custGeom>
-              <a:avLst/>
-              <a:gdLst/>
-              <a:ahLst/>
-              <a:cxnLst/>
-              <a:rect r="r" b="b" t="t" l="l"/>
-              <a:pathLst>
-                <a:path h="13716000" w="24384000">
-                  <a:moveTo>
-                    <a:pt x="0" y="0"/>
-                  </a:moveTo>
-                  <a:lnTo>
-                    <a:pt x="24384000" y="0"/>
-                  </a:lnTo>
-                  <a:lnTo>
-                    <a:pt x="24384000" y="13716000"/>
-                  </a:lnTo>
-                  <a:lnTo>
-                    <a:pt x="0" y="13716000"/>
-                  </a:lnTo>
-                  <a:lnTo>
-                    <a:pt x="0" y="0"/>
-                  </a:lnTo>
-                  <a:close/>
-                </a:path>
-              </a:pathLst>
-            </a:custGeom>
-            <a:blipFill>
-              <a:blip r:embed="rId3"/>
-              <a:stretch>
-                <a:fillRect l="0" t="0" r="0" b="0"/>
-              </a:stretch>
-            </a:blipFill>
-          </p:spPr>
-        </p:sp>
-      </p:grpSp>
-      <p:sp>
-        <p:nvSpPr>
-          <p:cNvPr name="TextBox 4" id="4"/>
+          </a:xfrm>
+          <a:custGeom>
+            <a:avLst/>
+            <a:gdLst/>
+            <a:ahLst/>
+            <a:cxnLst/>
+            <a:rect r="r" b="b" t="t" l="l"/>
+            <a:pathLst>
+              <a:path h="10287000" w="18288000">
+                <a:moveTo>
+                  <a:pt x="0" y="0"/>
+                </a:moveTo>
+                <a:lnTo>
+                  <a:pt x="18288000" y="0"/>
+                </a:lnTo>
+                <a:lnTo>
+                  <a:pt x="18288000" y="10287000"/>
+                </a:lnTo>
+                <a:lnTo>
+                  <a:pt x="0" y="10287000"/>
+                </a:lnTo>
+                <a:lnTo>
+                  <a:pt x="0" y="0"/>
+                </a:lnTo>
+                <a:close/>
+              </a:path>
+            </a:pathLst>
+          </a:custGeom>
+          <a:blipFill>
+            <a:blip r:embed="rId3"/>
+            <a:stretch>
+              <a:fillRect l="0" t="-9222" r="0" b="-9222"/>
+            </a:stretch>
+          </a:blipFill>
+        </p:spPr>
+      </p:sp>
+      <p:sp>
+        <p:nvSpPr>
+          <p:cNvPr name="TextBox 3" id="3"/>
           <p:cNvSpPr txBox="true"/>
           <p:nvPr/>
         </p:nvSpPr>
         <p:spPr>
           <a:xfrm rot="0">
             <a:off x="1143000" y="809625"/>
-            <a:ext cx="5010745" cy="695325"/>
+            <a:ext cx="6502400" cy="809625"/>
           </a:xfrm>
           <a:prstGeom prst="rect">
             <a:avLst/>
@@ -9695,11 +8758,11 @@
           <a:p>
             <a:pPr algn="l">
               <a:lnSpc>
-                <a:spcPts val="5130"/>
+                <a:spcPts val="6000"/>
               </a:lnSpc>
             </a:pPr>
             <a:r>
-              <a:rPr lang="en-US" b="true" sz="4275">
+              <a:rPr lang="en-US" b="true" sz="5000">
                 <a:solidFill>
                   <a:srgbClr val="1B5E20"/>
                 </a:solidFill>
@@ -9708,10 +8771,10 @@
                 <a:cs typeface="Poppins Bold"/>
                 <a:sym typeface="Poppins Bold"/>
               </a:rPr>
-              <a:t>Meta</a:t>
-            </a:r>
-            <a:r>
-              <a:rPr lang="en-US" b="true" sz="4275">
+              <a:t>DOM</a:t>
+            </a:r>
+            <a:r>
+              <a:rPr lang="en-US" b="true" sz="5000">
                 <a:solidFill>
                   <a:srgbClr val="1B5E20"/>
                 </a:solidFill>
@@ -9720,14 +8783,14 @@
                 <a:cs typeface="Poppins Bold"/>
                 <a:sym typeface="Poppins Bold"/>
               </a:rPr>
-              <a:t>data Binding</a:t>
+              <a:t> Tree Assembly</a:t>
             </a:r>
           </a:p>
         </p:txBody>
       </p:sp>
       <p:grpSp>
         <p:nvGrpSpPr>
-          <p:cNvPr name="Group 5" id="5"/>
+          <p:cNvPr name="Group 4" id="4"/>
           <p:cNvGrpSpPr/>
           <p:nvPr/>
         </p:nvGrpSpPr>
@@ -9741,7 +8804,7 @@
         </p:grpSpPr>
         <p:sp>
           <p:nvSpPr>
-            <p:cNvPr name="Freeform 6" id="6"/>
+            <p:cNvPr name="Freeform 5" id="5"/>
             <p:cNvSpPr/>
             <p:nvPr/>
           </p:nvSpPr>
@@ -9780,9 +8843,531 @@
           </p:spPr>
         </p:sp>
       </p:grpSp>
-      <p:sp>
-        <p:nvSpPr>
-          <p:cNvPr name="TextBox 7" id="7"/>
+      <p:grpSp>
+        <p:nvGrpSpPr>
+          <p:cNvPr name="Group 6" id="6"/>
+          <p:cNvGrpSpPr/>
+          <p:nvPr/>
+        </p:nvGrpSpPr>
+        <p:grpSpPr>
+          <a:xfrm rot="0">
+            <a:off x="240849" y="2208140"/>
+            <a:ext cx="8903151" cy="5870720"/>
+            <a:chOff x="0" y="0"/>
+            <a:chExt cx="10487066" cy="6915150"/>
+          </a:xfrm>
+        </p:grpSpPr>
+        <p:sp>
+          <p:nvSpPr>
+            <p:cNvPr name="Freeform 7" id="7" descr="image.png"/>
+            <p:cNvSpPr/>
+            <p:nvPr/>
+          </p:nvSpPr>
+          <p:spPr>
+            <a:xfrm flipH="false" flipV="false" rot="0">
+              <a:off x="0" y="0"/>
+              <a:ext cx="10487066" cy="6915150"/>
+            </a:xfrm>
+            <a:custGeom>
+              <a:avLst/>
+              <a:gdLst/>
+              <a:ahLst/>
+              <a:cxnLst/>
+              <a:rect r="r" b="b" t="t" l="l"/>
+              <a:pathLst>
+                <a:path h="6915150" w="10487066">
+                  <a:moveTo>
+                    <a:pt x="0" y="0"/>
+                  </a:moveTo>
+                  <a:lnTo>
+                    <a:pt x="10487066" y="0"/>
+                  </a:lnTo>
+                  <a:lnTo>
+                    <a:pt x="10487066" y="6915150"/>
+                  </a:lnTo>
+                  <a:lnTo>
+                    <a:pt x="0" y="6915150"/>
+                  </a:lnTo>
+                  <a:lnTo>
+                    <a:pt x="0" y="0"/>
+                  </a:lnTo>
+                  <a:close/>
+                </a:path>
+              </a:pathLst>
+            </a:custGeom>
+            <a:blipFill>
+              <a:blip r:embed="rId4"/>
+              <a:stretch>
+                <a:fillRect l="-862" t="0" r="-862" b="0"/>
+              </a:stretch>
+            </a:blipFill>
+          </p:spPr>
+        </p:sp>
+      </p:grpSp>
+      <p:sp>
+        <p:nvSpPr>
+          <p:cNvPr name="TextBox 8" id="8"/>
+          <p:cNvSpPr txBox="true"/>
+          <p:nvPr/>
+        </p:nvSpPr>
+        <p:spPr>
+          <a:xfrm rot="0">
+            <a:off x="857250" y="2490787"/>
+            <a:ext cx="8286750" cy="5276850"/>
+          </a:xfrm>
+          <a:prstGeom prst="rect">
+            <a:avLst/>
+          </a:prstGeom>
+        </p:spPr>
+        <p:txBody>
+          <a:bodyPr anchor="t" rtlCol="false" tIns="0" lIns="0" bIns="0" rIns="0">
+            <a:spAutoFit/>
+          </a:bodyPr>
+          <a:lstStyle/>
+          <a:p>
+            <a:pPr algn="l">
+              <a:lnSpc>
+                <a:spcPts val="4126"/>
+              </a:lnSpc>
+            </a:pPr>
+            <a:r>
+              <a:rPr lang="en-US" b="true" sz="3438">
+                <a:solidFill>
+                  <a:srgbClr val="2E7D32"/>
+                </a:solidFill>
+                <a:latin typeface="Poppins Bold"/>
+                <a:ea typeface="Poppins Bold"/>
+                <a:cs typeface="Poppins Bold"/>
+                <a:sym typeface="Poppins Bold"/>
+              </a:rPr>
+              <a:t>ca</a:t>
+            </a:r>
+            <a:r>
+              <a:rPr lang="en-US" b="true" sz="3438">
+                <a:solidFill>
+                  <a:srgbClr val="2E7D32"/>
+                </a:solidFill>
+                <a:latin typeface="Poppins Bold"/>
+                <a:ea typeface="Poppins Bold"/>
+                <a:cs typeface="Poppins Bold"/>
+                <a:sym typeface="Poppins Bold"/>
+              </a:rPr>
+              <a:t>rdBody.appendChild(title);</a:t>
+            </a:r>
+          </a:p>
+          <a:p>
+            <a:pPr algn="l">
+              <a:lnSpc>
+                <a:spcPts val="4126"/>
+              </a:lnSpc>
+            </a:pPr>
+            <a:r>
+              <a:rPr lang="en-US" b="true" sz="3438">
+                <a:solidFill>
+                  <a:srgbClr val="2E7D32"/>
+                </a:solidFill>
+                <a:latin typeface="Poppins Bold"/>
+                <a:ea typeface="Poppins Bold"/>
+                <a:cs typeface="Poppins Bold"/>
+                <a:sym typeface="Poppins Bold"/>
+              </a:rPr>
+              <a:t>cardBody.appendChild(priceText); </a:t>
+            </a:r>
+          </a:p>
+          <a:p>
+            <a:pPr algn="l">
+              <a:lnSpc>
+                <a:spcPts val="4126"/>
+              </a:lnSpc>
+            </a:pPr>
+            <a:r>
+              <a:rPr lang="en-US" b="true" sz="3438">
+                <a:solidFill>
+                  <a:srgbClr val="2E7D32"/>
+                </a:solidFill>
+                <a:latin typeface="Poppins Bold"/>
+                <a:ea typeface="Poppins Bold"/>
+                <a:cs typeface="Poppins Bold"/>
+                <a:sym typeface="Poppins Bold"/>
+              </a:rPr>
+              <a:t>card.appendChild(cardBody); </a:t>
+            </a:r>
+          </a:p>
+          <a:p>
+            <a:pPr algn="l">
+              <a:lnSpc>
+                <a:spcPts val="4126"/>
+              </a:lnSpc>
+            </a:pPr>
+            <a:r>
+              <a:rPr lang="en-US" b="true" sz="3438">
+                <a:solidFill>
+                  <a:srgbClr val="2E7D32"/>
+                </a:solidFill>
+                <a:latin typeface="Poppins Bold"/>
+                <a:ea typeface="Poppins Bold"/>
+                <a:cs typeface="Poppins Bold"/>
+                <a:sym typeface="Poppins Bold"/>
+              </a:rPr>
+              <a:t>productItem.appendChild(card);</a:t>
+            </a:r>
+          </a:p>
+          <a:p>
+            <a:pPr algn="l">
+              <a:lnSpc>
+                <a:spcPts val="4126"/>
+              </a:lnSpc>
+            </a:pPr>
+          </a:p>
+          <a:p>
+            <a:pPr algn="l">
+              <a:lnSpc>
+                <a:spcPts val="4126"/>
+              </a:lnSpc>
+            </a:pPr>
+            <a:r>
+              <a:rPr lang="en-US" b="true" sz="3438">
+                <a:solidFill>
+                  <a:srgbClr val="2E7D32"/>
+                </a:solidFill>
+                <a:latin typeface="Poppins Bold"/>
+                <a:ea typeface="Poppins Bold"/>
+                <a:cs typeface="Poppins Bold"/>
+                <a:sym typeface="Poppins Bold"/>
+              </a:rPr>
+              <a:t>document.getElementById("product?</a:t>
+            </a:r>
+          </a:p>
+          <a:p>
+            <a:pPr algn="l">
+              <a:lnSpc>
+                <a:spcPts val="4200"/>
+              </a:lnSpc>
+            </a:pPr>
+            <a:r>
+              <a:rPr lang="en-US" b="true" sz="3500">
+                <a:solidFill>
+                  <a:srgbClr val="2E7D32"/>
+                </a:solidFill>
+                <a:latin typeface="Poppins Bold"/>
+                <a:ea typeface="Poppins Bold"/>
+                <a:cs typeface="Poppins Bold"/>
+                <a:sym typeface="Poppins Bold"/>
+              </a:rPr>
+              <a:t>list") </a:t>
+            </a:r>
+          </a:p>
+          <a:p>
+            <a:pPr algn="l">
+              <a:lnSpc>
+                <a:spcPts val="4126"/>
+              </a:lnSpc>
+            </a:pPr>
+            <a:r>
+              <a:rPr lang="en-US" b="true" sz="3438">
+                <a:solidFill>
+                  <a:srgbClr val="2E7D32"/>
+                </a:solidFill>
+                <a:latin typeface="Poppins Bold"/>
+                <a:ea typeface="Poppins Bold"/>
+                <a:cs typeface="Poppins Bold"/>
+                <a:sym typeface="Poppins Bold"/>
+              </a:rPr>
+              <a:t> .appendChild(productItem);</a:t>
+            </a:r>
+          </a:p>
+          <a:p>
+            <a:pPr algn="l">
+              <a:lnSpc>
+                <a:spcPts val="4126"/>
+              </a:lnSpc>
+            </a:pPr>
+          </a:p>
+        </p:txBody>
+      </p:sp>
+      <p:sp>
+        <p:nvSpPr>
+          <p:cNvPr name="TextBox 9" id="9"/>
+          <p:cNvSpPr txBox="true"/>
+          <p:nvPr/>
+        </p:nvSpPr>
+        <p:spPr>
+          <a:xfrm rot="0">
+            <a:off x="9774209" y="2135505"/>
+            <a:ext cx="7485091" cy="5739765"/>
+          </a:xfrm>
+          <a:prstGeom prst="rect">
+            <a:avLst/>
+          </a:prstGeom>
+        </p:spPr>
+        <p:txBody>
+          <a:bodyPr anchor="t" rtlCol="false" tIns="0" lIns="0" bIns="0" rIns="0">
+            <a:spAutoFit/>
+          </a:bodyPr>
+          <a:lstStyle/>
+          <a:p>
+            <a:pPr algn="l">
+              <a:lnSpc>
+                <a:spcPts val="7679"/>
+              </a:lnSpc>
+            </a:pPr>
+            <a:r>
+              <a:rPr lang="en-US" sz="3999">
+                <a:solidFill>
+                  <a:srgbClr val="334155"/>
+                </a:solidFill>
+                <a:latin typeface="Lato"/>
+                <a:ea typeface="Lato"/>
+                <a:cs typeface="Lato"/>
+                <a:sym typeface="Lato"/>
+              </a:rPr>
+              <a:t>Const</a:t>
+            </a:r>
+            <a:r>
+              <a:rPr lang="en-US" sz="3999">
+                <a:solidFill>
+                  <a:srgbClr val="334155"/>
+                </a:solidFill>
+                <a:latin typeface="Lato"/>
+                <a:ea typeface="Lato"/>
+                <a:cs typeface="Lato"/>
+                <a:sym typeface="Lato"/>
+              </a:rPr>
+              <a:t>ructs nodes safely in browser local </a:t>
+            </a:r>
+          </a:p>
+          <a:p>
+            <a:pPr algn="l">
+              <a:lnSpc>
+                <a:spcPts val="7679"/>
+              </a:lnSpc>
+            </a:pPr>
+            <a:r>
+              <a:rPr lang="en-US" sz="3999">
+                <a:solidFill>
+                  <a:srgbClr val="334155"/>
+                </a:solidFill>
+                <a:latin typeface="Lato"/>
+                <a:ea typeface="Lato"/>
+                <a:cs typeface="Lato"/>
+                <a:sym typeface="Lato"/>
+              </a:rPr>
+              <a:t>memory before pushing them live to the </a:t>
+            </a:r>
+          </a:p>
+          <a:p>
+            <a:pPr algn="l">
+              <a:lnSpc>
+                <a:spcPts val="7679"/>
+              </a:lnSpc>
+            </a:pPr>
+            <a:r>
+              <a:rPr lang="en-US" sz="3999">
+                <a:solidFill>
+                  <a:srgbClr val="334155"/>
+                </a:solidFill>
+                <a:latin typeface="Lato"/>
+                <a:ea typeface="Lato"/>
+                <a:cs typeface="Lato"/>
+                <a:sym typeface="Lato"/>
+              </a:rPr>
+              <a:t>dynamic container.</a:t>
+            </a:r>
+          </a:p>
+          <a:p>
+            <a:pPr algn="l">
+              <a:lnSpc>
+                <a:spcPts val="7679"/>
+              </a:lnSpc>
+            </a:pPr>
+          </a:p>
+        </p:txBody>
+      </p:sp>
+    </p:spTree>
+  </p:cSld>
+  <p:clrMapOvr>
+    <a:masterClrMapping/>
+  </p:clrMapOvr>
+  <p:transition spd="fast">
+    <p:fade/>
+  </p:transition>
+</p:sld>
+</file>
+
+<file path=ppt/slides/slide7.xml><?xml version="1.0" encoding="utf-8"?>
+<p:sld xmlns:p="http://schemas.openxmlformats.org/presentationml/2006/main" xmlns:a="http://schemas.openxmlformats.org/drawingml/2006/main" xmlns:r="http://schemas.openxmlformats.org/officeDocument/2006/relationships">
+  <p:cSld>
+    <p:spTree>
+      <p:nvGrpSpPr>
+        <p:cNvPr id="1" name=""/>
+        <p:cNvGrpSpPr/>
+        <p:nvPr/>
+      </p:nvGrpSpPr>
+      <p:grpSpPr>
+        <a:xfrm>
+          <a:off x="0" y="0"/>
+          <a:ext cx="0" cy="0"/>
+          <a:chOff x="0" y="0"/>
+          <a:chExt cx="0" cy="0"/>
+        </a:xfrm>
+      </p:grpSpPr>
+      <p:sp>
+        <p:nvSpPr>
+          <p:cNvPr name="Freeform 2" id="2"/>
+          <p:cNvSpPr/>
+          <p:nvPr/>
+        </p:nvSpPr>
+        <p:spPr>
+          <a:xfrm flipH="false" flipV="false" rot="0">
+            <a:off x="0" y="0"/>
+            <a:ext cx="18288000" cy="10287000"/>
+          </a:xfrm>
+          <a:custGeom>
+            <a:avLst/>
+            <a:gdLst/>
+            <a:ahLst/>
+            <a:cxnLst/>
+            <a:rect r="r" b="b" t="t" l="l"/>
+            <a:pathLst>
+              <a:path h="10287000" w="18288000">
+                <a:moveTo>
+                  <a:pt x="0" y="0"/>
+                </a:moveTo>
+                <a:lnTo>
+                  <a:pt x="18288000" y="0"/>
+                </a:lnTo>
+                <a:lnTo>
+                  <a:pt x="18288000" y="10287000"/>
+                </a:lnTo>
+                <a:lnTo>
+                  <a:pt x="0" y="10287000"/>
+                </a:lnTo>
+                <a:lnTo>
+                  <a:pt x="0" y="0"/>
+                </a:lnTo>
+                <a:close/>
+              </a:path>
+            </a:pathLst>
+          </a:custGeom>
+          <a:blipFill>
+            <a:blip r:embed="rId3"/>
+            <a:stretch>
+              <a:fillRect l="0" t="-9222" r="0" b="-9222"/>
+            </a:stretch>
+          </a:blipFill>
+        </p:spPr>
+      </p:sp>
+      <p:sp>
+        <p:nvSpPr>
+          <p:cNvPr name="TextBox 3" id="3"/>
+          <p:cNvSpPr txBox="true"/>
+          <p:nvPr/>
+        </p:nvSpPr>
+        <p:spPr>
+          <a:xfrm rot="0">
+            <a:off x="1143000" y="809625"/>
+            <a:ext cx="5860455" cy="809625"/>
+          </a:xfrm>
+          <a:prstGeom prst="rect">
+            <a:avLst/>
+          </a:prstGeom>
+        </p:spPr>
+        <p:txBody>
+          <a:bodyPr anchor="t" rtlCol="false" tIns="0" lIns="0" bIns="0" rIns="0">
+            <a:spAutoFit/>
+          </a:bodyPr>
+          <a:lstStyle/>
+          <a:p>
+            <a:pPr algn="l">
+              <a:lnSpc>
+                <a:spcPts val="6000"/>
+              </a:lnSpc>
+            </a:pPr>
+            <a:r>
+              <a:rPr lang="en-US" b="true" sz="5000">
+                <a:solidFill>
+                  <a:srgbClr val="1B5E20"/>
+                </a:solidFill>
+                <a:latin typeface="Poppins Bold"/>
+                <a:ea typeface="Poppins Bold"/>
+                <a:cs typeface="Poppins Bold"/>
+                <a:sym typeface="Poppins Bold"/>
+              </a:rPr>
+              <a:t>Meta</a:t>
+            </a:r>
+            <a:r>
+              <a:rPr lang="en-US" b="true" sz="5000">
+                <a:solidFill>
+                  <a:srgbClr val="1B5E20"/>
+                </a:solidFill>
+                <a:latin typeface="Poppins Bold"/>
+                <a:ea typeface="Poppins Bold"/>
+                <a:cs typeface="Poppins Bold"/>
+                <a:sym typeface="Poppins Bold"/>
+              </a:rPr>
+              <a:t>data Binding</a:t>
+            </a:r>
+          </a:p>
+        </p:txBody>
+      </p:sp>
+      <p:grpSp>
+        <p:nvGrpSpPr>
+          <p:cNvPr name="Group 4" id="4"/>
+          <p:cNvGrpSpPr/>
+          <p:nvPr/>
+        </p:nvGrpSpPr>
+        <p:grpSpPr>
+          <a:xfrm rot="0">
+            <a:off x="857250" y="857250"/>
+            <a:ext cx="114300" cy="814388"/>
+            <a:chOff x="0" y="0"/>
+            <a:chExt cx="152400" cy="1085850"/>
+          </a:xfrm>
+        </p:grpSpPr>
+        <p:sp>
+          <p:nvSpPr>
+            <p:cNvPr name="Freeform 5" id="5"/>
+            <p:cNvSpPr/>
+            <p:nvPr/>
+          </p:nvSpPr>
+          <p:spPr>
+            <a:xfrm flipH="false" flipV="false" rot="0">
+              <a:off x="0" y="0"/>
+              <a:ext cx="152400" cy="1085850"/>
+            </a:xfrm>
+            <a:custGeom>
+              <a:avLst/>
+              <a:gdLst/>
+              <a:ahLst/>
+              <a:cxnLst/>
+              <a:rect r="r" b="b" t="t" l="l"/>
+              <a:pathLst>
+                <a:path h="1085850" w="152400">
+                  <a:moveTo>
+                    <a:pt x="0" y="0"/>
+                  </a:moveTo>
+                  <a:lnTo>
+                    <a:pt x="152400" y="0"/>
+                  </a:lnTo>
+                  <a:lnTo>
+                    <a:pt x="152400" y="1085850"/>
+                  </a:lnTo>
+                  <a:lnTo>
+                    <a:pt x="0" y="1085850"/>
+                  </a:lnTo>
+                  <a:close/>
+                </a:path>
+              </a:pathLst>
+            </a:custGeom>
+            <a:solidFill>
+              <a:srgbClr val="8BC34A"/>
+            </a:solidFill>
+          </p:spPr>
+        </p:sp>
+      </p:grpSp>
+      <p:sp>
+        <p:nvSpPr>
+          <p:cNvPr name="TextBox 6" id="6"/>
           <p:cNvSpPr txBox="true"/>
           <p:nvPr/>
         </p:nvSpPr>
@@ -9823,14 +9408,14 @@
       </p:sp>
       <p:sp>
         <p:nvSpPr>
-          <p:cNvPr name="TextBox 8" id="8"/>
+          <p:cNvPr name="TextBox 7" id="7"/>
           <p:cNvSpPr txBox="true"/>
           <p:nvPr/>
         </p:nvSpPr>
         <p:spPr>
           <a:xfrm rot="0">
-            <a:off x="869801" y="2033327"/>
-            <a:ext cx="8180984" cy="3903326"/>
+            <a:off x="565127" y="1842986"/>
+            <a:ext cx="8159552" cy="7682865"/>
           </a:xfrm>
           <a:prstGeom prst="rect">
             <a:avLst/>
@@ -9844,11 +9429,11 @@
           <a:p>
             <a:pPr algn="l">
               <a:lnSpc>
-                <a:spcPts val="6311"/>
+                <a:spcPts val="7679"/>
               </a:lnSpc>
             </a:pPr>
             <a:r>
-              <a:rPr lang="en-US" sz="3286">
+              <a:rPr lang="en-US" sz="3999">
                 <a:solidFill>
                   <a:srgbClr val="334155"/>
                 </a:solidFill>
@@ -9860,7 +9445,7 @@
               <a:t>Embedding system identifie</a:t>
             </a:r>
             <a:r>
-              <a:rPr lang="en-US" sz="3286">
+              <a:rPr lang="en-US" sz="3999">
                 <a:solidFill>
                   <a:srgbClr val="334155"/>
                 </a:solidFill>
@@ -9875,11 +9460,11 @@
           <a:p>
             <a:pPr algn="l">
               <a:lnSpc>
-                <a:spcPts val="6311"/>
+                <a:spcPts val="7679"/>
               </a:lnSpc>
             </a:pPr>
             <a:r>
-              <a:rPr lang="en-US" sz="3286">
+              <a:rPr lang="en-US" sz="3999">
                 <a:solidFill>
                   <a:srgbClr val="334155"/>
                 </a:solidFill>
@@ -9894,11 +9479,11 @@
           <a:p>
             <a:pPr algn="l">
               <a:lnSpc>
-                <a:spcPts val="6311"/>
+                <a:spcPts val="7679"/>
               </a:lnSpc>
             </a:pPr>
             <a:r>
-              <a:rPr lang="en-US" sz="3286">
+              <a:rPr lang="en-US" sz="3999">
                 <a:solidFill>
                   <a:srgbClr val="334155"/>
                 </a:solidFill>
@@ -9913,11 +9498,11 @@
           <a:p>
             <a:pPr algn="l">
               <a:lnSpc>
-                <a:spcPts val="6311"/>
+                <a:spcPts val="7679"/>
               </a:lnSpc>
             </a:pPr>
             <a:r>
-              <a:rPr lang="en-US" sz="3286">
+              <a:rPr lang="en-US" sz="3999">
                 <a:solidFill>
                   <a:srgbClr val="334155"/>
                 </a:solidFill>
@@ -9932,7 +9517,7 @@
           <a:p>
             <a:pPr algn="l">
               <a:lnSpc>
-                <a:spcPts val="6311"/>
+                <a:spcPts val="7679"/>
               </a:lnSpc>
             </a:pPr>
           </a:p>
@@ -9940,7 +9525,7 @@
       </p:sp>
       <p:grpSp>
         <p:nvGrpSpPr>
-          <p:cNvPr name="Group 9" id="9"/>
+          <p:cNvPr name="Group 8" id="8"/>
           <p:cNvGrpSpPr/>
           <p:nvPr/>
         </p:nvGrpSpPr>
@@ -9954,7 +9539,7 @@
         </p:grpSpPr>
         <p:sp>
           <p:nvSpPr>
-            <p:cNvPr name="Freeform 10" id="10" descr="image.png"/>
+            <p:cNvPr name="Freeform 9" id="9" descr="image.png"/>
             <p:cNvSpPr/>
             <p:nvPr/>
           </p:nvSpPr>
@@ -10001,14 +9586,14 @@
       </p:grpSp>
       <p:sp>
         <p:nvSpPr>
-          <p:cNvPr name="TextBox 11" id="11"/>
+          <p:cNvPr name="TextBox 10" id="10"/>
           <p:cNvSpPr txBox="true"/>
           <p:nvPr/>
         </p:nvSpPr>
         <p:spPr>
           <a:xfrm rot="0">
-            <a:off x="9144000" y="2242877"/>
-            <a:ext cx="8758992" cy="4416793"/>
+            <a:off x="9144000" y="2233352"/>
+            <a:ext cx="8758992" cy="4838700"/>
           </a:xfrm>
           <a:prstGeom prst="rect">
             <a:avLst/>
@@ -10022,11 +9607,11 @@
           <a:p>
             <a:pPr algn="l">
               <a:lnSpc>
-                <a:spcPts val="3869"/>
+                <a:spcPts val="4200"/>
               </a:lnSpc>
             </a:pPr>
             <a:r>
-              <a:rPr lang="en-US" b="true" sz="3224">
+              <a:rPr lang="en-US" b="true" sz="3500">
                 <a:solidFill>
                   <a:srgbClr val="2E7D32"/>
                 </a:solidFill>
@@ -10038,7 +9623,7 @@
               <a:t>btnA</a:t>
             </a:r>
             <a:r>
-              <a:rPr lang="en-US" b="true" sz="3224">
+              <a:rPr lang="en-US" b="true" sz="3500">
                 <a:solidFill>
                   <a:srgbClr val="2E7D32"/>
                 </a:solidFill>
@@ -10053,11 +9638,11 @@
           <a:p>
             <a:pPr algn="l">
               <a:lnSpc>
-                <a:spcPts val="3869"/>
+                <a:spcPts val="4200"/>
               </a:lnSpc>
             </a:pPr>
             <a:r>
-              <a:rPr lang="en-US" b="true" sz="3224">
+              <a:rPr lang="en-US" b="true" sz="3500">
                 <a:solidFill>
                   <a:srgbClr val="2E7D32"/>
                 </a:solidFill>
@@ -10072,18 +9657,18 @@
           <a:p>
             <a:pPr algn="l">
               <a:lnSpc>
-                <a:spcPts val="3869"/>
+                <a:spcPts val="4200"/>
               </a:lnSpc>
             </a:pPr>
           </a:p>
           <a:p>
             <a:pPr algn="l">
               <a:lnSpc>
-                <a:spcPts val="3869"/>
+                <a:spcPts val="4200"/>
               </a:lnSpc>
             </a:pPr>
             <a:r>
-              <a:rPr lang="en-US" b="true" sz="3224">
+              <a:rPr lang="en-US" b="true" sz="3500">
                 <a:solidFill>
                   <a:srgbClr val="2E7D32"/>
                 </a:solidFill>
@@ -10098,11 +9683,11 @@
           <a:p>
             <a:pPr algn="l">
               <a:lnSpc>
-                <a:spcPts val="3869"/>
+                <a:spcPts val="4200"/>
               </a:lnSpc>
             </a:pPr>
             <a:r>
-              <a:rPr lang="en-US" b="true" sz="3224">
+              <a:rPr lang="en-US" b="true" sz="3500">
                 <a:solidFill>
                   <a:srgbClr val="2E7D32"/>
                 </a:solidFill>
@@ -10117,18 +9702,18 @@
           <a:p>
             <a:pPr algn="l">
               <a:lnSpc>
-                <a:spcPts val="3869"/>
+                <a:spcPts val="4200"/>
               </a:lnSpc>
             </a:pPr>
           </a:p>
           <a:p>
             <a:pPr algn="l">
               <a:lnSpc>
-                <a:spcPts val="3869"/>
+                <a:spcPts val="4200"/>
               </a:lnSpc>
             </a:pPr>
             <a:r>
-              <a:rPr lang="en-US" b="true" sz="3224">
+              <a:rPr lang="en-US" b="true" sz="3500">
                 <a:solidFill>
                   <a:srgbClr val="2E7D32"/>
                 </a:solidFill>
@@ -10143,11 +9728,11 @@
           <a:p>
             <a:pPr algn="l">
               <a:lnSpc>
-                <a:spcPts val="3869"/>
+                <a:spcPts val="4200"/>
               </a:lnSpc>
             </a:pPr>
             <a:r>
-              <a:rPr lang="en-US" b="true" sz="3224">
+              <a:rPr lang="en-US" b="true" sz="3500">
                 <a:solidFill>
                   <a:srgbClr val="2E7D32"/>
                 </a:solidFill>
@@ -10162,7 +9747,7 @@
           <a:p>
             <a:pPr algn="l">
               <a:lnSpc>
-                <a:spcPts val="3869"/>
+                <a:spcPts val="4200"/>
               </a:lnSpc>
             </a:pPr>
           </a:p>
@@ -10196,77 +9781,62 @@
           <a:chExt cx="0" cy="0"/>
         </a:xfrm>
       </p:grpSpPr>
-      <p:grpSp>
-        <p:nvGrpSpPr>
-          <p:cNvPr name="Group 2" id="2"/>
-          <p:cNvGrpSpPr/>
+      <p:sp>
+        <p:nvSpPr>
+          <p:cNvPr name="Freeform 2" id="2"/>
+          <p:cNvSpPr/>
           <p:nvPr/>
-        </p:nvGrpSpPr>
-        <p:grpSpPr>
-          <a:xfrm rot="0">
+        </p:nvSpPr>
+        <p:spPr>
+          <a:xfrm flipH="false" flipV="false" rot="0">
             <a:off x="0" y="0"/>
             <a:ext cx="18288000" cy="10287000"/>
-            <a:chOff x="0" y="0"/>
-            <a:chExt cx="24384000" cy="13716000"/>
-          </a:xfrm>
-        </p:grpSpPr>
-        <p:sp>
-          <p:nvSpPr>
-            <p:cNvPr name="Freeform 3" id="3" descr="image.png"/>
-            <p:cNvSpPr/>
-            <p:nvPr/>
-          </p:nvSpPr>
-          <p:spPr>
-            <a:xfrm flipH="false" flipV="false" rot="0">
-              <a:off x="0" y="0"/>
-              <a:ext cx="24384000" cy="13716000"/>
-            </a:xfrm>
-            <a:custGeom>
-              <a:avLst/>
-              <a:gdLst/>
-              <a:ahLst/>
-              <a:cxnLst/>
-              <a:rect r="r" b="b" t="t" l="l"/>
-              <a:pathLst>
-                <a:path h="13716000" w="24384000">
-                  <a:moveTo>
-                    <a:pt x="0" y="0"/>
-                  </a:moveTo>
-                  <a:lnTo>
-                    <a:pt x="24384000" y="0"/>
-                  </a:lnTo>
-                  <a:lnTo>
-                    <a:pt x="24384000" y="13716000"/>
-                  </a:lnTo>
-                  <a:lnTo>
-                    <a:pt x="0" y="13716000"/>
-                  </a:lnTo>
-                  <a:lnTo>
-                    <a:pt x="0" y="0"/>
-                  </a:lnTo>
-                  <a:close/>
-                </a:path>
-              </a:pathLst>
-            </a:custGeom>
-            <a:blipFill>
-              <a:blip r:embed="rId3"/>
-              <a:stretch>
-                <a:fillRect l="0" t="0" r="0" b="0"/>
-              </a:stretch>
-            </a:blipFill>
-          </p:spPr>
-        </p:sp>
-      </p:grpSp>
-      <p:sp>
-        <p:nvSpPr>
-          <p:cNvPr name="TextBox 4" id="4"/>
+          </a:xfrm>
+          <a:custGeom>
+            <a:avLst/>
+            <a:gdLst/>
+            <a:ahLst/>
+            <a:cxnLst/>
+            <a:rect r="r" b="b" t="t" l="l"/>
+            <a:pathLst>
+              <a:path h="10287000" w="18288000">
+                <a:moveTo>
+                  <a:pt x="0" y="0"/>
+                </a:moveTo>
+                <a:lnTo>
+                  <a:pt x="18288000" y="0"/>
+                </a:lnTo>
+                <a:lnTo>
+                  <a:pt x="18288000" y="10287000"/>
+                </a:lnTo>
+                <a:lnTo>
+                  <a:pt x="0" y="10287000"/>
+                </a:lnTo>
+                <a:lnTo>
+                  <a:pt x="0" y="0"/>
+                </a:lnTo>
+                <a:close/>
+              </a:path>
+            </a:pathLst>
+          </a:custGeom>
+          <a:blipFill>
+            <a:blip r:embed="rId3"/>
+            <a:stretch>
+              <a:fillRect l="0" t="-9222" r="0" b="-9222"/>
+            </a:stretch>
+          </a:blipFill>
+        </p:spPr>
+      </p:sp>
+      <p:sp>
+        <p:nvSpPr>
+          <p:cNvPr name="TextBox 3" id="3"/>
           <p:cNvSpPr txBox="true"/>
           <p:nvPr/>
         </p:nvSpPr>
         <p:spPr>
           <a:xfrm rot="0">
             <a:off x="1157402" y="892969"/>
-            <a:ext cx="7501052" cy="695325"/>
+            <a:ext cx="7501052" cy="809625"/>
           </a:xfrm>
           <a:prstGeom prst="rect">
             <a:avLst/>
@@ -10280,11 +9850,11 @@
           <a:p>
             <a:pPr algn="l">
               <a:lnSpc>
-                <a:spcPts val="5130"/>
+                <a:spcPts val="6000"/>
               </a:lnSpc>
             </a:pPr>
             <a:r>
-              <a:rPr lang="en-US" b="true" sz="4275">
+              <a:rPr lang="en-US" b="true" sz="5000">
                 <a:solidFill>
                   <a:srgbClr val="1B5E20"/>
                 </a:solidFill>
@@ -10296,7 +9866,7 @@
               <a:t>Eve</a:t>
             </a:r>
             <a:r>
-              <a:rPr lang="en-US" b="true" sz="4275">
+              <a:rPr lang="en-US" b="true" sz="5000">
                 <a:solidFill>
                   <a:srgbClr val="1B5E20"/>
                 </a:solidFill>
@@ -10312,7 +9882,7 @@
       </p:sp>
       <p:grpSp>
         <p:nvGrpSpPr>
-          <p:cNvPr name="Group 5" id="5"/>
+          <p:cNvPr name="Group 4" id="4"/>
           <p:cNvGrpSpPr/>
           <p:nvPr/>
         </p:nvGrpSpPr>
@@ -10326,7 +9896,7 @@
         </p:grpSpPr>
         <p:sp>
           <p:nvSpPr>
-            <p:cNvPr name="Freeform 6" id="6"/>
+            <p:cNvPr name="Freeform 5" id="5"/>
             <p:cNvSpPr/>
             <p:nvPr/>
           </p:nvSpPr>
@@ -10365,6 +9935,123 @@
           </p:spPr>
         </p:sp>
       </p:grpSp>
+      <p:sp>
+        <p:nvSpPr>
+          <p:cNvPr name="TextBox 6" id="6"/>
+          <p:cNvSpPr txBox="true"/>
+          <p:nvPr/>
+        </p:nvSpPr>
+        <p:spPr>
+          <a:xfrm rot="0">
+            <a:off x="10107016" y="1163955"/>
+            <a:ext cx="7152284" cy="7682865"/>
+          </a:xfrm>
+          <a:prstGeom prst="rect">
+            <a:avLst/>
+          </a:prstGeom>
+        </p:spPr>
+        <p:txBody>
+          <a:bodyPr anchor="t" rtlCol="false" tIns="0" lIns="0" bIns="0" rIns="0">
+            <a:spAutoFit/>
+          </a:bodyPr>
+          <a:lstStyle/>
+          <a:p>
+            <a:pPr algn="l">
+              <a:lnSpc>
+                <a:spcPts val="7680"/>
+              </a:lnSpc>
+            </a:pPr>
+            <a:r>
+              <a:rPr lang="en-US" sz="4000">
+                <a:solidFill>
+                  <a:srgbClr val="334155"/>
+                </a:solidFill>
+                <a:latin typeface="Lato"/>
+                <a:ea typeface="Lato"/>
+                <a:cs typeface="Lato"/>
+                <a:sym typeface="Lato"/>
+              </a:rPr>
+              <a:t>Attaching a single event listene</a:t>
+            </a:r>
+            <a:r>
+              <a:rPr lang="en-US" sz="4000">
+                <a:solidFill>
+                  <a:srgbClr val="334155"/>
+                </a:solidFill>
+                <a:latin typeface="Lato"/>
+                <a:ea typeface="Lato"/>
+                <a:cs typeface="Lato"/>
+                <a:sym typeface="Lato"/>
+              </a:rPr>
+              <a:t>r to </a:t>
+            </a:r>
+          </a:p>
+          <a:p>
+            <a:pPr algn="l">
+              <a:lnSpc>
+                <a:spcPts val="7680"/>
+              </a:lnSpc>
+            </a:pPr>
+            <a:r>
+              <a:rPr lang="en-US" sz="4000">
+                <a:solidFill>
+                  <a:srgbClr val="334155"/>
+                </a:solidFill>
+                <a:latin typeface="Lato"/>
+                <a:ea typeface="Lato"/>
+                <a:cs typeface="Lato"/>
+                <a:sym typeface="Lato"/>
+              </a:rPr>
+              <a:t>the static parent node instead of </a:t>
+            </a:r>
+          </a:p>
+          <a:p>
+            <a:pPr algn="l">
+              <a:lnSpc>
+                <a:spcPts val="7680"/>
+              </a:lnSpc>
+            </a:pPr>
+            <a:r>
+              <a:rPr lang="en-US" sz="4000">
+                <a:solidFill>
+                  <a:srgbClr val="334155"/>
+                </a:solidFill>
+                <a:latin typeface="Lato"/>
+                <a:ea typeface="Lato"/>
+                <a:cs typeface="Lato"/>
+                <a:sym typeface="Lato"/>
+              </a:rPr>
+              <a:t>hundreds of child buttons. Minimizes </a:t>
+            </a:r>
+          </a:p>
+          <a:p>
+            <a:pPr algn="l">
+              <a:lnSpc>
+                <a:spcPts val="7680"/>
+              </a:lnSpc>
+            </a:pPr>
+            <a:r>
+              <a:rPr lang="en-US" sz="4000">
+                <a:solidFill>
+                  <a:srgbClr val="334155"/>
+                </a:solidFill>
+                <a:latin typeface="Lato"/>
+                <a:ea typeface="Lato"/>
+                <a:cs typeface="Lato"/>
+                <a:sym typeface="Lato"/>
+              </a:rPr>
+              <a:t>application RAM footprint.</a:t>
+            </a:r>
+          </a:p>
+          <a:p>
+            <a:pPr algn="l">
+              <a:lnSpc>
+                <a:spcPts val="7680"/>
+              </a:lnSpc>
+            </a:pPr>
+          </a:p>
+        </p:txBody>
+      </p:sp>
       <p:grpSp>
         <p:nvGrpSpPr>
           <p:cNvPr name="Group 7" id="7"/>
@@ -10373,10 +10060,10 @@
         </p:nvGrpSpPr>
         <p:grpSpPr>
           <a:xfrm rot="0">
-            <a:off x="1028700" y="2670155"/>
-            <a:ext cx="8723134" cy="6333974"/>
+            <a:off x="240849" y="2208140"/>
+            <a:ext cx="8903151" cy="5870720"/>
             <a:chOff x="0" y="0"/>
-            <a:chExt cx="10275023" cy="7460819"/>
+            <a:chExt cx="10487066" cy="6915150"/>
           </a:xfrm>
         </p:grpSpPr>
         <p:sp>
@@ -10388,7 +10075,7 @@
           <p:spPr>
             <a:xfrm flipH="false" flipV="false" rot="0">
               <a:off x="0" y="0"/>
-              <a:ext cx="10275022" cy="7460819"/>
+              <a:ext cx="10487066" cy="6915150"/>
             </a:xfrm>
             <a:custGeom>
               <a:avLst/>
@@ -10397,18 +10084,18 @@
               <a:cxnLst/>
               <a:rect r="r" b="b" t="t" l="l"/>
               <a:pathLst>
-                <a:path h="7460819" w="10275022">
+                <a:path h="6915150" w="10487066">
                   <a:moveTo>
                     <a:pt x="0" y="0"/>
                   </a:moveTo>
                   <a:lnTo>
-                    <a:pt x="10275022" y="0"/>
+                    <a:pt x="10487066" y="0"/>
                   </a:lnTo>
                   <a:lnTo>
-                    <a:pt x="10275022" y="7460819"/>
+                    <a:pt x="10487066" y="6915150"/>
                   </a:lnTo>
                   <a:lnTo>
-                    <a:pt x="0" y="7460819"/>
+                    <a:pt x="0" y="6915150"/>
                   </a:lnTo>
                   <a:lnTo>
                     <a:pt x="0" y="0"/>
@@ -10420,7 +10107,7 @@
             <a:blipFill>
               <a:blip r:embed="rId4"/>
               <a:stretch>
-                <a:fillRect l="-6008" t="0" r="-6008" b="0"/>
+                <a:fillRect l="-862" t="0" r="-862" b="0"/>
               </a:stretch>
             </a:blipFill>
           </p:spPr>
@@ -10434,8 +10121,8 @@
         </p:nvSpPr>
         <p:spPr>
           <a:xfrm rot="0">
-            <a:off x="1157402" y="3124597"/>
-            <a:ext cx="8758992" cy="5879532"/>
+            <a:off x="637442" y="2528094"/>
+            <a:ext cx="8021011" cy="5211763"/>
           </a:xfrm>
           <a:prstGeom prst="rect">
             <a:avLst/>
@@ -10449,11 +10136,11 @@
           <a:p>
             <a:pPr algn="l">
               <a:lnSpc>
-                <a:spcPts val="3869"/>
+                <a:spcPts val="3461"/>
               </a:lnSpc>
             </a:pPr>
             <a:r>
-              <a:rPr lang="en-US" b="true" sz="3224">
+              <a:rPr lang="en-US" b="true" sz="2884">
                 <a:solidFill>
                   <a:srgbClr val="2E7D32"/>
                 </a:solidFill>
@@ -10465,7 +10152,7 @@
               <a:t>document</a:t>
             </a:r>
             <a:r>
-              <a:rPr lang="en-US" b="true" sz="3224">
+              <a:rPr lang="en-US" b="true" sz="2884">
                 <a:solidFill>
                   <a:srgbClr val="2E7D32"/>
                 </a:solidFill>
@@ -10480,11 +10167,11 @@
           <a:p>
             <a:pPr algn="l">
               <a:lnSpc>
-                <a:spcPts val="3869"/>
+                <a:spcPts val="3461"/>
               </a:lnSpc>
             </a:pPr>
             <a:r>
-              <a:rPr lang="en-US" b="true" sz="3224">
+              <a:rPr lang="en-US" b="true" sz="2884">
                 <a:solidFill>
                   <a:srgbClr val="2E7D32"/>
                 </a:solidFill>
@@ -10499,11 +10186,11 @@
           <a:p>
             <a:pPr algn="l">
               <a:lnSpc>
-                <a:spcPts val="3869"/>
+                <a:spcPts val="3461"/>
               </a:lnSpc>
             </a:pPr>
             <a:r>
-              <a:rPr lang="en-US" b="true" sz="3224">
+              <a:rPr lang="en-US" b="true" sz="2884">
                 <a:solidFill>
                   <a:srgbClr val="2E7D32"/>
                 </a:solidFill>
@@ -10518,11 +10205,11 @@
           <a:p>
             <a:pPr algn="l">
               <a:lnSpc>
-                <a:spcPts val="3869"/>
+                <a:spcPts val="3461"/>
               </a:lnSpc>
             </a:pPr>
             <a:r>
-              <a:rPr lang="en-US" b="true" sz="3224">
+              <a:rPr lang="en-US" b="true" sz="2884">
                 <a:solidFill>
                   <a:srgbClr val="2E7D32"/>
                 </a:solidFill>
@@ -10537,11 +10224,11 @@
           <a:p>
             <a:pPr algn="l">
               <a:lnSpc>
-                <a:spcPts val="3869"/>
+                <a:spcPts val="3461"/>
               </a:lnSpc>
             </a:pPr>
             <a:r>
-              <a:rPr lang="en-US" b="true" sz="3224">
+              <a:rPr lang="en-US" b="true" sz="2884">
                 <a:solidFill>
                   <a:srgbClr val="2E7D32"/>
                 </a:solidFill>
@@ -10556,11 +10243,11 @@
           <a:p>
             <a:pPr algn="l">
               <a:lnSpc>
-                <a:spcPts val="3869"/>
+                <a:spcPts val="3461"/>
               </a:lnSpc>
             </a:pPr>
             <a:r>
-              <a:rPr lang="en-US" b="true" sz="3224">
+              <a:rPr lang="en-US" b="true" sz="2884">
                 <a:solidFill>
                   <a:srgbClr val="2E7D32"/>
                 </a:solidFill>
@@ -10575,11 +10262,11 @@
           <a:p>
             <a:pPr algn="l">
               <a:lnSpc>
-                <a:spcPts val="3869"/>
+                <a:spcPts val="3461"/>
               </a:lnSpc>
             </a:pPr>
             <a:r>
-              <a:rPr lang="en-US" b="true" sz="3224">
+              <a:rPr lang="en-US" b="true" sz="2884">
                 <a:solidFill>
                   <a:srgbClr val="2E7D32"/>
                 </a:solidFill>
@@ -10594,11 +10281,11 @@
           <a:p>
             <a:pPr algn="l">
               <a:lnSpc>
-                <a:spcPts val="3869"/>
+                <a:spcPts val="3461"/>
               </a:lnSpc>
             </a:pPr>
             <a:r>
-              <a:rPr lang="en-US" b="true" sz="3224">
+              <a:rPr lang="en-US" b="true" sz="2884">
                 <a:solidFill>
                   <a:srgbClr val="2E7D32"/>
                 </a:solidFill>
@@ -10613,11 +10300,11 @@
           <a:p>
             <a:pPr algn="l">
               <a:lnSpc>
-                <a:spcPts val="3869"/>
+                <a:spcPts val="3461"/>
               </a:lnSpc>
             </a:pPr>
             <a:r>
-              <a:rPr lang="en-US" b="true" sz="3224">
+              <a:rPr lang="en-US" b="true" sz="2884">
                 <a:solidFill>
                   <a:srgbClr val="2E7D32"/>
                 </a:solidFill>
@@ -10632,11 +10319,11 @@
           <a:p>
             <a:pPr algn="l">
               <a:lnSpc>
-                <a:spcPts val="3869"/>
+                <a:spcPts val="3461"/>
               </a:lnSpc>
             </a:pPr>
             <a:r>
-              <a:rPr lang="en-US" b="true" sz="3224">
+              <a:rPr lang="en-US" b="true" sz="2884">
                 <a:solidFill>
                   <a:srgbClr val="2E7D32"/>
                 </a:solidFill>
@@ -10651,11 +10338,11 @@
           <a:p>
             <a:pPr algn="l">
               <a:lnSpc>
-                <a:spcPts val="3869"/>
+                <a:spcPts val="3461"/>
               </a:lnSpc>
             </a:pPr>
             <a:r>
-              <a:rPr lang="en-US" b="true" sz="3224">
+              <a:rPr lang="en-US" b="true" sz="2884">
                 <a:solidFill>
                   <a:srgbClr val="2E7D32"/>
                 </a:solidFill>
@@ -10670,124 +10357,7 @@
           <a:p>
             <a:pPr algn="l">
               <a:lnSpc>
-                <a:spcPts val="3869"/>
-              </a:lnSpc>
-            </a:pPr>
-          </a:p>
-        </p:txBody>
-      </p:sp>
-      <p:sp>
-        <p:nvSpPr>
-          <p:cNvPr name="TextBox 10" id="10"/>
-          <p:cNvSpPr txBox="true"/>
-          <p:nvPr/>
-        </p:nvSpPr>
-        <p:spPr>
-          <a:xfrm rot="0">
-            <a:off x="10107016" y="2915047"/>
-            <a:ext cx="7152284" cy="3903326"/>
-          </a:xfrm>
-          <a:prstGeom prst="rect">
-            <a:avLst/>
-          </a:prstGeom>
-        </p:spPr>
-        <p:txBody>
-          <a:bodyPr anchor="t" rtlCol="false" tIns="0" lIns="0" bIns="0" rIns="0">
-            <a:spAutoFit/>
-          </a:bodyPr>
-          <a:lstStyle/>
-          <a:p>
-            <a:pPr algn="l">
-              <a:lnSpc>
-                <a:spcPts val="6311"/>
-              </a:lnSpc>
-            </a:pPr>
-            <a:r>
-              <a:rPr lang="en-US" sz="3286">
-                <a:solidFill>
-                  <a:srgbClr val="334155"/>
-                </a:solidFill>
-                <a:latin typeface="Lato"/>
-                <a:ea typeface="Lato"/>
-                <a:cs typeface="Lato"/>
-                <a:sym typeface="Lato"/>
-              </a:rPr>
-              <a:t>Attaching a single event listene</a:t>
-            </a:r>
-            <a:r>
-              <a:rPr lang="en-US" sz="3286">
-                <a:solidFill>
-                  <a:srgbClr val="334155"/>
-                </a:solidFill>
-                <a:latin typeface="Lato"/>
-                <a:ea typeface="Lato"/>
-                <a:cs typeface="Lato"/>
-                <a:sym typeface="Lato"/>
-              </a:rPr>
-              <a:t>r to </a:t>
-            </a:r>
-          </a:p>
-          <a:p>
-            <a:pPr algn="l">
-              <a:lnSpc>
-                <a:spcPts val="6311"/>
-              </a:lnSpc>
-            </a:pPr>
-            <a:r>
-              <a:rPr lang="en-US" sz="3286">
-                <a:solidFill>
-                  <a:srgbClr val="334155"/>
-                </a:solidFill>
-                <a:latin typeface="Lato"/>
-                <a:ea typeface="Lato"/>
-                <a:cs typeface="Lato"/>
-                <a:sym typeface="Lato"/>
-              </a:rPr>
-              <a:t>the static parent node instead of </a:t>
-            </a:r>
-          </a:p>
-          <a:p>
-            <a:pPr algn="l">
-              <a:lnSpc>
-                <a:spcPts val="6311"/>
-              </a:lnSpc>
-            </a:pPr>
-            <a:r>
-              <a:rPr lang="en-US" sz="3286">
-                <a:solidFill>
-                  <a:srgbClr val="334155"/>
-                </a:solidFill>
-                <a:latin typeface="Lato"/>
-                <a:ea typeface="Lato"/>
-                <a:cs typeface="Lato"/>
-                <a:sym typeface="Lato"/>
-              </a:rPr>
-              <a:t>hundreds of child buttons. Minimizes </a:t>
-            </a:r>
-          </a:p>
-          <a:p>
-            <a:pPr algn="l">
-              <a:lnSpc>
-                <a:spcPts val="6311"/>
-              </a:lnSpc>
-            </a:pPr>
-            <a:r>
-              <a:rPr lang="en-US" sz="3286">
-                <a:solidFill>
-                  <a:srgbClr val="334155"/>
-                </a:solidFill>
-                <a:latin typeface="Lato"/>
-                <a:ea typeface="Lato"/>
-                <a:cs typeface="Lato"/>
-                <a:sym typeface="Lato"/>
-              </a:rPr>
-              <a:t>application RAM footprint.</a:t>
-            </a:r>
-          </a:p>
-          <a:p>
-            <a:pPr algn="l">
-              <a:lnSpc>
-                <a:spcPts val="6311"/>
+                <a:spcPts val="3461"/>
               </a:lnSpc>
             </a:pPr>
           </a:p>
@@ -10821,77 +10391,62 @@
           <a:chExt cx="0" cy="0"/>
         </a:xfrm>
       </p:grpSpPr>
-      <p:grpSp>
-        <p:nvGrpSpPr>
-          <p:cNvPr name="Group 2" id="2"/>
-          <p:cNvGrpSpPr/>
+      <p:sp>
+        <p:nvSpPr>
+          <p:cNvPr name="Freeform 2" id="2"/>
+          <p:cNvSpPr/>
           <p:nvPr/>
-        </p:nvGrpSpPr>
-        <p:grpSpPr>
-          <a:xfrm rot="0">
+        </p:nvSpPr>
+        <p:spPr>
+          <a:xfrm flipH="false" flipV="false" rot="0">
             <a:off x="0" y="0"/>
             <a:ext cx="18288000" cy="10287000"/>
-            <a:chOff x="0" y="0"/>
-            <a:chExt cx="24384000" cy="13716000"/>
-          </a:xfrm>
-        </p:grpSpPr>
-        <p:sp>
-          <p:nvSpPr>
-            <p:cNvPr name="Freeform 3" id="3" descr="image.png"/>
-            <p:cNvSpPr/>
-            <p:nvPr/>
-          </p:nvSpPr>
-          <p:spPr>
-            <a:xfrm flipH="false" flipV="false" rot="0">
-              <a:off x="0" y="0"/>
-              <a:ext cx="24384000" cy="13716000"/>
-            </a:xfrm>
-            <a:custGeom>
-              <a:avLst/>
-              <a:gdLst/>
-              <a:ahLst/>
-              <a:cxnLst/>
-              <a:rect r="r" b="b" t="t" l="l"/>
-              <a:pathLst>
-                <a:path h="13716000" w="24384000">
-                  <a:moveTo>
-                    <a:pt x="0" y="0"/>
-                  </a:moveTo>
-                  <a:lnTo>
-                    <a:pt x="24384000" y="0"/>
-                  </a:lnTo>
-                  <a:lnTo>
-                    <a:pt x="24384000" y="13716000"/>
-                  </a:lnTo>
-                  <a:lnTo>
-                    <a:pt x="0" y="13716000"/>
-                  </a:lnTo>
-                  <a:lnTo>
-                    <a:pt x="0" y="0"/>
-                  </a:lnTo>
-                  <a:close/>
-                </a:path>
-              </a:pathLst>
-            </a:custGeom>
-            <a:blipFill>
-              <a:blip r:embed="rId3"/>
-              <a:stretch>
-                <a:fillRect l="0" t="0" r="0" b="0"/>
-              </a:stretch>
-            </a:blipFill>
-          </p:spPr>
-        </p:sp>
-      </p:grpSp>
-      <p:sp>
-        <p:nvSpPr>
-          <p:cNvPr name="TextBox 4" id="4"/>
+          </a:xfrm>
+          <a:custGeom>
+            <a:avLst/>
+            <a:gdLst/>
+            <a:ahLst/>
+            <a:cxnLst/>
+            <a:rect r="r" b="b" t="t" l="l"/>
+            <a:pathLst>
+              <a:path h="10287000" w="18288000">
+                <a:moveTo>
+                  <a:pt x="0" y="0"/>
+                </a:moveTo>
+                <a:lnTo>
+                  <a:pt x="18288000" y="0"/>
+                </a:lnTo>
+                <a:lnTo>
+                  <a:pt x="18288000" y="10287000"/>
+                </a:lnTo>
+                <a:lnTo>
+                  <a:pt x="0" y="10287000"/>
+                </a:lnTo>
+                <a:lnTo>
+                  <a:pt x="0" y="0"/>
+                </a:lnTo>
+                <a:close/>
+              </a:path>
+            </a:pathLst>
+          </a:custGeom>
+          <a:blipFill>
+            <a:blip r:embed="rId3"/>
+            <a:stretch>
+              <a:fillRect l="0" t="-9222" r="0" b="-9222"/>
+            </a:stretch>
+          </a:blipFill>
+        </p:spPr>
+      </p:sp>
+      <p:sp>
+        <p:nvSpPr>
+          <p:cNvPr name="TextBox 3" id="3"/>
           <p:cNvSpPr txBox="true"/>
           <p:nvPr/>
         </p:nvSpPr>
         <p:spPr>
           <a:xfrm rot="0">
             <a:off x="1143000" y="809625"/>
-            <a:ext cx="7907735" cy="695325"/>
+            <a:ext cx="9248775" cy="809625"/>
           </a:xfrm>
           <a:prstGeom prst="rect">
             <a:avLst/>
@@ -10905,11 +10460,11 @@
           <a:p>
             <a:pPr algn="l">
               <a:lnSpc>
-                <a:spcPts val="5130"/>
+                <a:spcPts val="6000"/>
               </a:lnSpc>
             </a:pPr>
             <a:r>
-              <a:rPr lang="en-US" b="true" sz="4275">
+              <a:rPr lang="en-US" b="true" sz="5000">
                 <a:solidFill>
                   <a:srgbClr val="1B5E20"/>
                 </a:solidFill>
@@ -10921,7 +10476,7 @@
               <a:t>U</a:t>
             </a:r>
             <a:r>
-              <a:rPr lang="en-US" b="true" sz="4275">
+              <a:rPr lang="en-US" b="true" sz="5000">
                 <a:solidFill>
                   <a:srgbClr val="1B5E20"/>
                 </a:solidFill>
@@ -10937,7 +10492,7 @@
       </p:sp>
       <p:grpSp>
         <p:nvGrpSpPr>
-          <p:cNvPr name="Group 5" id="5"/>
+          <p:cNvPr name="Group 4" id="4"/>
           <p:cNvGrpSpPr/>
           <p:nvPr/>
         </p:nvGrpSpPr>
@@ -10951,7 +10506,7 @@
         </p:grpSpPr>
         <p:sp>
           <p:nvSpPr>
-            <p:cNvPr name="Freeform 6" id="6"/>
+            <p:cNvPr name="Freeform 5" id="5"/>
             <p:cNvSpPr/>
             <p:nvPr/>
           </p:nvSpPr>
@@ -10992,14 +10547,14 @@
       </p:grpSp>
       <p:sp>
         <p:nvSpPr>
-          <p:cNvPr name="TextBox 7" id="7"/>
+          <p:cNvPr name="TextBox 6" id="6"/>
           <p:cNvSpPr txBox="true"/>
           <p:nvPr/>
         </p:nvSpPr>
         <p:spPr>
           <a:xfrm rot="0">
-            <a:off x="971550" y="2736321"/>
-            <a:ext cx="7152284" cy="3903326"/>
+            <a:off x="971550" y="2698221"/>
+            <a:ext cx="7152284" cy="6711315"/>
           </a:xfrm>
           <a:prstGeom prst="rect">
             <a:avLst/>
@@ -11013,11 +10568,11 @@
           <a:p>
             <a:pPr algn="l">
               <a:lnSpc>
-                <a:spcPts val="6311"/>
+                <a:spcPts val="7680"/>
               </a:lnSpc>
             </a:pPr>
             <a:r>
-              <a:rPr lang="en-US" sz="3286">
+              <a:rPr lang="en-US" sz="4000">
                 <a:solidFill>
                   <a:srgbClr val="334155"/>
                 </a:solidFill>
@@ -11029,7 +10584,7 @@
               <a:t>P</a:t>
             </a:r>
             <a:r>
-              <a:rPr lang="en-US" sz="3286">
+              <a:rPr lang="en-US" sz="4000">
                 <a:solidFill>
                   <a:srgbClr val="334155"/>
                 </a:solidFill>
@@ -11044,11 +10599,11 @@
           <a:p>
             <a:pPr algn="l">
               <a:lnSpc>
-                <a:spcPts val="6311"/>
+                <a:spcPts val="7680"/>
               </a:lnSpc>
             </a:pPr>
             <a:r>
-              <a:rPr lang="en-US" sz="3286">
+              <a:rPr lang="en-US" sz="4000">
                 <a:solidFill>
                   <a:srgbClr val="334155"/>
                 </a:solidFill>
@@ -11060,7 +10615,7 @@
               <a:t>location que</a:t>
             </a:r>
             <a:r>
-              <a:rPr lang="en-US" sz="3286">
+              <a:rPr lang="en-US" sz="4000">
                 <a:solidFill>
                   <a:srgbClr val="334155"/>
                 </a:solidFill>
@@ -11075,11 +10630,11 @@
           <a:p>
             <a:pPr algn="l">
               <a:lnSpc>
-                <a:spcPts val="6311"/>
+                <a:spcPts val="7680"/>
               </a:lnSpc>
             </a:pPr>
             <a:r>
-              <a:rPr lang="en-US" sz="3286">
+              <a:rPr lang="en-US" sz="4000">
                 <a:solidFill>
                   <a:srgbClr val="334155"/>
                 </a:solidFill>
@@ -11094,11 +10649,11 @@
           <a:p>
             <a:pPr algn="l">
               <a:lnSpc>
-                <a:spcPts val="6311"/>
+                <a:spcPts val="7680"/>
               </a:lnSpc>
             </a:pPr>
             <a:r>
-              <a:rPr lang="en-US" sz="3286">
+              <a:rPr lang="en-US" sz="4000">
                 <a:solidFill>
                   <a:srgbClr val="334155"/>
                 </a:solidFill>
@@ -11113,7 +10668,7 @@
           <a:p>
             <a:pPr algn="l">
               <a:lnSpc>
-                <a:spcPts val="6311"/>
+                <a:spcPts val="7680"/>
               </a:lnSpc>
             </a:pPr>
           </a:p>
@@ -11121,13 +10676,13 @@
       </p:sp>
       <p:grpSp>
         <p:nvGrpSpPr>
-          <p:cNvPr name="Group 8" id="8"/>
+          <p:cNvPr name="Group 7" id="7"/>
           <p:cNvGrpSpPr/>
           <p:nvPr/>
         </p:nvGrpSpPr>
         <p:grpSpPr>
           <a:xfrm rot="0">
-            <a:off x="8123834" y="2303461"/>
+            <a:off x="8123834" y="2005583"/>
             <a:ext cx="9743300" cy="6275835"/>
             <a:chOff x="0" y="0"/>
             <a:chExt cx="11476681" cy="7392337"/>
@@ -11135,7 +10690,7 @@
         </p:grpSpPr>
         <p:sp>
           <p:nvSpPr>
-            <p:cNvPr name="Freeform 9" id="9" descr="image.png"/>
+            <p:cNvPr name="Freeform 8" id="8" descr="image.png"/>
             <p:cNvSpPr/>
             <p:nvPr/>
           </p:nvSpPr>
@@ -11182,14 +10737,14 @@
       </p:grpSp>
       <p:sp>
         <p:nvSpPr>
-          <p:cNvPr name="TextBox 10" id="10"/>
+          <p:cNvPr name="TextBox 9" id="9"/>
           <p:cNvSpPr txBox="true"/>
           <p:nvPr/>
         </p:nvSpPr>
         <p:spPr>
           <a:xfrm rot="0">
-            <a:off x="8405261" y="2945871"/>
-            <a:ext cx="9497730" cy="3929213"/>
+            <a:off x="8405261" y="2705100"/>
+            <a:ext cx="9497730" cy="4838700"/>
           </a:xfrm>
           <a:prstGeom prst="rect">
             <a:avLst/>
@@ -11203,11 +10758,11 @@
           <a:p>
             <a:pPr algn="l">
               <a:lnSpc>
-                <a:spcPts val="3869"/>
+                <a:spcPts val="4200"/>
               </a:lnSpc>
             </a:pPr>
             <a:r>
-              <a:rPr lang="en-US" b="true" sz="3224">
+              <a:rPr lang="en-US" b="true" sz="3500">
                 <a:solidFill>
                   <a:srgbClr val="2E7D32"/>
                 </a:solidFill>
@@ -11219,7 +10774,7 @@
               <a:t>con</a:t>
             </a:r>
             <a:r>
-              <a:rPr lang="en-US" b="true" sz="3224">
+              <a:rPr lang="en-US" b="true" sz="3500">
                 <a:solidFill>
                   <a:srgbClr val="2E7D32"/>
                 </a:solidFill>
@@ -11234,11 +10789,11 @@
           <a:p>
             <a:pPr algn="l">
               <a:lnSpc>
-                <a:spcPts val="3869"/>
+                <a:spcPts val="4200"/>
               </a:lnSpc>
             </a:pPr>
             <a:r>
-              <a:rPr lang="en-US" b="true" sz="3224">
+              <a:rPr lang="en-US" b="true" sz="3500">
                 <a:solidFill>
                   <a:srgbClr val="2E7D32"/>
                 </a:solidFill>
@@ -11253,11 +10808,11 @@
           <a:p>
             <a:pPr algn="l">
               <a:lnSpc>
-                <a:spcPts val="3869"/>
+                <a:spcPts val="4200"/>
               </a:lnSpc>
             </a:pPr>
             <a:r>
-              <a:rPr lang="en-US" b="true" sz="3224">
+              <a:rPr lang="en-US" b="true" sz="3500">
                 <a:solidFill>
                   <a:srgbClr val="2E7D32"/>
                 </a:solidFill>
@@ -11272,11 +10827,11 @@
           <a:p>
             <a:pPr algn="l">
               <a:lnSpc>
-                <a:spcPts val="3869"/>
+                <a:spcPts val="4200"/>
               </a:lnSpc>
             </a:pPr>
             <a:r>
-              <a:rPr lang="en-US" b="true" sz="3224">
+              <a:rPr lang="en-US" b="true" sz="3500">
                 <a:solidFill>
                   <a:srgbClr val="2E7D32"/>
                 </a:solidFill>
@@ -11291,11 +10846,11 @@
           <a:p>
             <a:pPr algn="l">
               <a:lnSpc>
-                <a:spcPts val="3869"/>
+                <a:spcPts val="4200"/>
               </a:lnSpc>
             </a:pPr>
             <a:r>
-              <a:rPr lang="en-US" b="true" sz="3224">
+              <a:rPr lang="en-US" b="true" sz="3500">
                 <a:solidFill>
                   <a:srgbClr val="2E7D32"/>
                 </a:solidFill>
@@ -11310,11 +10865,11 @@
           <a:p>
             <a:pPr algn="l">
               <a:lnSpc>
-                <a:spcPts val="3869"/>
+                <a:spcPts val="4200"/>
               </a:lnSpc>
             </a:pPr>
             <a:r>
-              <a:rPr lang="en-US" b="true" sz="3224">
+              <a:rPr lang="en-US" b="true" sz="3500">
                 <a:solidFill>
                   <a:srgbClr val="2E7D32"/>
                 </a:solidFill>
@@ -11329,11 +10884,11 @@
           <a:p>
             <a:pPr algn="l">
               <a:lnSpc>
-                <a:spcPts val="3869"/>
+                <a:spcPts val="4200"/>
               </a:lnSpc>
             </a:pPr>
             <a:r>
-              <a:rPr lang="en-US" b="true" sz="3224">
+              <a:rPr lang="en-US" b="true" sz="3500">
                 <a:solidFill>
                   <a:srgbClr val="2E7D32"/>
                 </a:solidFill>
@@ -11348,7 +10903,7 @@
           <a:p>
             <a:pPr algn="l">
               <a:lnSpc>
-                <a:spcPts val="3869"/>
+                <a:spcPts val="4200"/>
               </a:lnSpc>
             </a:pPr>
           </a:p>
